--- a/presentation/CyberneticsNLP_Talk.pptx
+++ b/presentation/CyberneticsNLP_Talk.pptx
@@ -4,6 +4,9 @@
   <p:sldMasterIdLst>
     <p:sldMasterId id="2147483648" r:id="rId1"/>
   </p:sldMasterIdLst>
+  <p:notesMasterIdLst>
+    <p:notesMasterId r:id="rId25"/>
+  </p:notesMasterIdLst>
   <p:sldIdLst>
     <p:sldId id="256" r:id="rId2"/>
     <p:sldId id="257" r:id="rId3"/>
@@ -29,10 +32,7 @@
     <p:sldId id="277" r:id="rId23"/>
     <p:sldId id="278" r:id="rId24"/>
   </p:sldIdLst>
-  <p:notesMasterIdLst>
-    <p:notesMasterId r:id="rId25"/>
-  </p:notesMasterIdLst>
-  <p:sldSz cx="9144000" cy="5143500"/>
+  <p:sldSz cx="9144000" cy="5143500" type="screen16x9"/>
   <p:notesSz cx="5143500" cy="9144000"/>
   <p:defaultTextStyle>
     <a:lvl1pPr marL="0" algn="l" defTabSz="914400" rtl="0" eaLnBrk="1" latinLnBrk="0" hangingPunct="1">
@@ -126,7 +126,49 @@
       </a:defRPr>
     </a:lvl9pPr>
   </p:defaultTextStyle>
+  <p:extLst>
+    <p:ext uri="{EFAFB233-063F-42B5-8137-9DF3F51BA10A}">
+      <p15:sldGuideLst xmlns:p15="http://schemas.microsoft.com/office/powerpoint/2012/main"/>
+    </p:ext>
+  </p:extLst>
 </p:presentation>
+</file>
+
+<file path=ppt/revisionInfo.xml><?xml version="1.0" encoding="utf-8"?>
+<p1510:revInfo xmlns:a="http://schemas.openxmlformats.org/drawingml/2006/main" xmlns:r="http://schemas.openxmlformats.org/officeDocument/2006/relationships" xmlns:p1510="http://schemas.microsoft.com/office/powerpoint/2015/10/main">
+  <p1510:revLst>
+    <p1510:client id="{CDEC08D2-94A7-6C77-5D87-818355955A9E}" v="3" dt="2026-03-30T12:05:28.719"/>
+  </p1510:revLst>
+</p1510:revInfo>
+</file>
+
+<file path=ppt/changesInfos/changesInfo1.xml><?xml version="1.0" encoding="utf-8"?>
+<pc:chgInfo xmlns:a="http://schemas.openxmlformats.org/drawingml/2006/main" xmlns:r="http://schemas.openxmlformats.org/officeDocument/2006/relationships" xmlns:ac="http://schemas.microsoft.com/office/drawing/2013/main/command" xmlns:pc="http://schemas.microsoft.com/office/powerpoint/2013/main/command">
+  <pc:docChgLst>
+    <pc:chgData name="Paul Wong" userId="S::u9714433@anu.edu.au::5e64d0a3-bab2-48bb-9a3e-8a148f9f6928" providerId="AD" clId="Web-{CDEC08D2-94A7-6C77-5D87-818355955A9E}"/>
+    <pc:docChg chg="modSld">
+      <pc:chgData name="Paul Wong" userId="S::u9714433@anu.edu.au::5e64d0a3-bab2-48bb-9a3e-8a148f9f6928" providerId="AD" clId="Web-{CDEC08D2-94A7-6C77-5D87-818355955A9E}" dt="2026-03-30T12:05:28.719" v="2" actId="1076"/>
+      <pc:docMkLst>
+        <pc:docMk/>
+      </pc:docMkLst>
+      <pc:sldChg chg="addSp modSp">
+        <pc:chgData name="Paul Wong" userId="S::u9714433@anu.edu.au::5e64d0a3-bab2-48bb-9a3e-8a148f9f6928" providerId="AD" clId="Web-{CDEC08D2-94A7-6C77-5D87-818355955A9E}" dt="2026-03-30T12:05:28.719" v="2" actId="1076"/>
+        <pc:sldMkLst>
+          <pc:docMk/>
+          <pc:sldMk cId="0" sldId="257"/>
+        </pc:sldMkLst>
+        <pc:picChg chg="add mod">
+          <ac:chgData name="Paul Wong" userId="S::u9714433@anu.edu.au::5e64d0a3-bab2-48bb-9a3e-8a148f9f6928" providerId="AD" clId="Web-{CDEC08D2-94A7-6C77-5D87-818355955A9E}" dt="2026-03-30T12:05:28.719" v="2" actId="1076"/>
+          <ac:picMkLst>
+            <pc:docMk/>
+            <pc:sldMk cId="0" sldId="257"/>
+            <ac:picMk id="24" creationId="{1751FD9A-E57A-DE50-691A-DB8B4AF13022}"/>
+          </ac:picMkLst>
+        </pc:picChg>
+      </pc:sldChg>
+    </pc:docChg>
+  </pc:docChgLst>
+</pc:chgInfo>
 </file>
 
 <file path=ppt/notesMasters/notesMaster1.xml><?xml version="1.0" encoding="utf-8"?>
@@ -164,7 +206,7 @@
         <p:spPr>
           <a:xfrm>
             <a:off x="0" y="0"/>
-            <a:ext cx="2971800" cy="458788"/>
+            <a:ext cx="2228850" cy="458788"/>
           </a:xfrm>
           <a:prstGeom prst="rect">
             <a:avLst/>
@@ -194,8 +236,8 @@
         </p:nvSpPr>
         <p:spPr>
           <a:xfrm>
-            <a:off x="3884613" y="0"/>
-            <a:ext cx="2971800" cy="458788"/>
+            <a:off x="2913063" y="0"/>
+            <a:ext cx="2228850" cy="458788"/>
           </a:xfrm>
           <a:prstGeom prst="rect">
             <a:avLst/>
@@ -209,9 +251,8 @@
             </a:lvl1pPr>
           </a:lstStyle>
           <a:p>
-            <a:fld id="{5282F153-3F37-0F45-9E97-73ACFA13230C}" type="datetimeFigureOut">
-              <a:rPr lang="en-US"/>
-              <a:t>7/23/19</a:t>
+            <a:fld id="{2C7017ED-2D8C-4973-B524-FD7C29B480D6}" type="datetimeFigureOut">
+              <a:t>3/30/2026</a:t>
             </a:fld>
             <a:endParaRPr lang="en-US"/>
           </a:p>
@@ -229,7 +270,7 @@
         </p:nvSpPr>
         <p:spPr>
           <a:xfrm>
-            <a:off x="685800" y="1143000"/>
+            <a:off x="-171450" y="1143000"/>
             <a:ext cx="5486400" cy="3086100"/>
           </a:xfrm>
           <a:prstGeom prst="rect">
@@ -262,8 +303,8 @@
         </p:nvSpPr>
         <p:spPr>
           <a:xfrm>
-            <a:off x="685800" y="4400550"/>
-            <a:ext cx="5486400" cy="3600450"/>
+            <a:off x="514350" y="4400550"/>
+            <a:ext cx="4114800" cy="3600450"/>
           </a:xfrm>
           <a:prstGeom prst="rect">
             <a:avLst/>
@@ -322,7 +363,7 @@
         <p:spPr>
           <a:xfrm>
             <a:off x="0" y="8685213"/>
-            <a:ext cx="2971800" cy="458787"/>
+            <a:ext cx="2228850" cy="458787"/>
           </a:xfrm>
           <a:prstGeom prst="rect">
             <a:avLst/>
@@ -352,8 +393,8 @@
         </p:nvSpPr>
         <p:spPr>
           <a:xfrm>
-            <a:off x="3884613" y="8685213"/>
-            <a:ext cx="2971800" cy="458787"/>
+            <a:off x="2913063" y="8685213"/>
+            <a:ext cx="2228850" cy="458787"/>
           </a:xfrm>
           <a:prstGeom prst="rect">
             <a:avLst/>
@@ -367,8 +408,7 @@
             </a:lvl1pPr>
           </a:lstStyle>
           <a:p>
-            <a:fld id="{CE5E9CC1-C706-0F49-92D6-E571CC5EEA8F}" type="slidenum">
-              <a:rPr lang="en-US"/>
+            <a:fld id="{D5ECA9D7-41BA-4B16-81E9-1C2E4446407D}" type="slidenum">
               <a:t>‹#›</a:t>
             </a:fld>
             <a:endParaRPr lang="en-US"/>
@@ -378,7 +418,7 @@
     </p:spTree>
     <p:extLst>
       <p:ext uri="{BB962C8B-B14F-4D97-AF65-F5344CB8AC3E}">
-        <p14:creationId xmlns:p14="http://schemas.microsoft.com/office/powerpoint/2010/main" val="1024086991"/>
+        <p14:creationId xmlns:p14="http://schemas.microsoft.com/office/powerpoint/2010/main" val="3037688110"/>
       </p:ext>
     </p:extLst>
   </p:cSld>
@@ -522,10 +562,6 @@
           <a:bodyPr/>
           <a:lstStyle/>
           <a:p>
-            <a:r>
-              <a:rPr lang="en-US" dirty="0"/>
-              <a:t/>
-            </a:r>
             <a:endParaRPr lang="en-US" dirty="0"/>
           </a:p>
         </p:txBody>
@@ -610,10 +646,6 @@
           <a:bodyPr/>
           <a:lstStyle/>
           <a:p>
-            <a:r>
-              <a:rPr lang="en-US" dirty="0"/>
-              <a:t/>
-            </a:r>
             <a:endParaRPr lang="en-US" dirty="0"/>
           </a:p>
         </p:txBody>
@@ -698,10 +730,6 @@
           <a:bodyPr/>
           <a:lstStyle/>
           <a:p>
-            <a:r>
-              <a:rPr lang="en-US" dirty="0"/>
-              <a:t/>
-            </a:r>
             <a:endParaRPr lang="en-US" dirty="0"/>
           </a:p>
         </p:txBody>
@@ -786,10 +814,6 @@
           <a:bodyPr/>
           <a:lstStyle/>
           <a:p>
-            <a:r>
-              <a:rPr lang="en-US" dirty="0"/>
-              <a:t/>
-            </a:r>
             <a:endParaRPr lang="en-US" dirty="0"/>
           </a:p>
         </p:txBody>
@@ -874,10 +898,6 @@
           <a:bodyPr/>
           <a:lstStyle/>
           <a:p>
-            <a:r>
-              <a:rPr lang="en-US" dirty="0"/>
-              <a:t/>
-            </a:r>
             <a:endParaRPr lang="en-US" dirty="0"/>
           </a:p>
         </p:txBody>
@@ -962,10 +982,6 @@
           <a:bodyPr/>
           <a:lstStyle/>
           <a:p>
-            <a:r>
-              <a:rPr lang="en-US" dirty="0"/>
-              <a:t/>
-            </a:r>
             <a:endParaRPr lang="en-US" dirty="0"/>
           </a:p>
         </p:txBody>
@@ -1050,10 +1066,6 @@
           <a:bodyPr/>
           <a:lstStyle/>
           <a:p>
-            <a:r>
-              <a:rPr lang="en-US" dirty="0"/>
-              <a:t/>
-            </a:r>
             <a:endParaRPr lang="en-US" dirty="0"/>
           </a:p>
         </p:txBody>
@@ -1138,10 +1150,6 @@
           <a:bodyPr/>
           <a:lstStyle/>
           <a:p>
-            <a:r>
-              <a:rPr lang="en-US" dirty="0"/>
-              <a:t/>
-            </a:r>
             <a:endParaRPr lang="en-US" dirty="0"/>
           </a:p>
         </p:txBody>
@@ -1226,10 +1234,6 @@
           <a:bodyPr/>
           <a:lstStyle/>
           <a:p>
-            <a:r>
-              <a:rPr lang="en-US" dirty="0"/>
-              <a:t/>
-            </a:r>
             <a:endParaRPr lang="en-US" dirty="0"/>
           </a:p>
         </p:txBody>
@@ -1314,10 +1318,6 @@
           <a:bodyPr/>
           <a:lstStyle/>
           <a:p>
-            <a:r>
-              <a:rPr lang="en-US" dirty="0"/>
-              <a:t/>
-            </a:r>
             <a:endParaRPr lang="en-US" dirty="0"/>
           </a:p>
         </p:txBody>
@@ -1402,10 +1402,6 @@
           <a:bodyPr/>
           <a:lstStyle/>
           <a:p>
-            <a:r>
-              <a:rPr lang="en-US" dirty="0"/>
-              <a:t/>
-            </a:r>
             <a:endParaRPr lang="en-US" dirty="0"/>
           </a:p>
         </p:txBody>
@@ -1490,10 +1486,6 @@
           <a:bodyPr/>
           <a:lstStyle/>
           <a:p>
-            <a:r>
-              <a:rPr lang="en-US" dirty="0"/>
-              <a:t/>
-            </a:r>
             <a:endParaRPr lang="en-US" dirty="0"/>
           </a:p>
         </p:txBody>
@@ -1578,10 +1570,6 @@
           <a:bodyPr/>
           <a:lstStyle/>
           <a:p>
-            <a:r>
-              <a:rPr lang="en-US" dirty="0"/>
-              <a:t/>
-            </a:r>
             <a:endParaRPr lang="en-US" dirty="0"/>
           </a:p>
         </p:txBody>
@@ -1666,10 +1654,6 @@
           <a:bodyPr/>
           <a:lstStyle/>
           <a:p>
-            <a:r>
-              <a:rPr lang="en-US" dirty="0"/>
-              <a:t/>
-            </a:r>
             <a:endParaRPr lang="en-US" dirty="0"/>
           </a:p>
         </p:txBody>
@@ -1754,10 +1738,6 @@
           <a:bodyPr/>
           <a:lstStyle/>
           <a:p>
-            <a:r>
-              <a:rPr lang="en-US" dirty="0"/>
-              <a:t/>
-            </a:r>
             <a:endParaRPr lang="en-US" dirty="0"/>
           </a:p>
         </p:txBody>
@@ -1842,10 +1822,6 @@
           <a:bodyPr/>
           <a:lstStyle/>
           <a:p>
-            <a:r>
-              <a:rPr lang="en-US" dirty="0"/>
-              <a:t/>
-            </a:r>
             <a:endParaRPr lang="en-US" dirty="0"/>
           </a:p>
         </p:txBody>
@@ -1930,10 +1906,6 @@
           <a:bodyPr/>
           <a:lstStyle/>
           <a:p>
-            <a:r>
-              <a:rPr lang="en-US" dirty="0"/>
-              <a:t/>
-            </a:r>
             <a:endParaRPr lang="en-US" dirty="0"/>
           </a:p>
         </p:txBody>
@@ -2018,10 +1990,6 @@
           <a:bodyPr/>
           <a:lstStyle/>
           <a:p>
-            <a:r>
-              <a:rPr lang="en-US" dirty="0"/>
-              <a:t/>
-            </a:r>
             <a:endParaRPr lang="en-US" dirty="0"/>
           </a:p>
         </p:txBody>
@@ -2106,10 +2074,6 @@
           <a:bodyPr/>
           <a:lstStyle/>
           <a:p>
-            <a:r>
-              <a:rPr lang="en-US" dirty="0"/>
-              <a:t/>
-            </a:r>
             <a:endParaRPr lang="en-US" dirty="0"/>
           </a:p>
         </p:txBody>
@@ -2194,10 +2158,6 @@
           <a:bodyPr/>
           <a:lstStyle/>
           <a:p>
-            <a:r>
-              <a:rPr lang="en-US" dirty="0"/>
-              <a:t/>
-            </a:r>
             <a:endParaRPr lang="en-US" dirty="0"/>
           </a:p>
         </p:txBody>
@@ -2282,10 +2242,6 @@
           <a:bodyPr/>
           <a:lstStyle/>
           <a:p>
-            <a:r>
-              <a:rPr lang="en-US" dirty="0"/>
-              <a:t/>
-            </a:r>
             <a:endParaRPr lang="en-US" dirty="0"/>
           </a:p>
         </p:txBody>
@@ -2370,10 +2326,6 @@
           <a:bodyPr/>
           <a:lstStyle/>
           <a:p>
-            <a:r>
-              <a:rPr lang="en-US" dirty="0"/>
-              <a:t/>
-            </a:r>
             <a:endParaRPr lang="en-US" dirty="0"/>
           </a:p>
         </p:txBody>
@@ -2458,10 +2410,6 @@
           <a:bodyPr/>
           <a:lstStyle/>
           <a:p>
-            <a:r>
-              <a:rPr lang="en-US" dirty="0"/>
-              <a:t/>
-            </a:r>
             <a:endParaRPr lang="en-US" dirty="0"/>
           </a:p>
         </p:txBody>
@@ -2535,6 +2483,11 @@
 <file path=ppt/slideMasters/slideMaster1.xml><?xml version="1.0" encoding="utf-8"?>
 <p:sldMaster xmlns:a="http://schemas.openxmlformats.org/drawingml/2006/main" xmlns:r="http://schemas.openxmlformats.org/officeDocument/2006/relationships" xmlns:p="http://schemas.openxmlformats.org/presentationml/2006/main">
   <p:cSld>
+    <p:bg>
+      <p:bgRef idx="1001">
+        <a:schemeClr val="bg1"/>
+      </p:bgRef>
+    </p:bg>
     <p:spTree>
       <p:nvGrpSpPr>
         <p:cNvPr id="1" name=""/>
@@ -2817,6 +2770,7 @@
         <a:solidFill>
           <a:srgbClr val="1B2E4B"/>
         </a:solidFill>
+        <a:effectLst/>
       </p:bgPr>
     </p:bg>
     <p:spTree>
@@ -3644,7 +3598,7 @@
           <a:bodyPr wrap="square" rtlCol="0" anchor="ctr"/>
           <a:lstStyle/>
           <a:p>
-            <a:pPr indent="0" marL="0">
+            <a:pPr marL="0" indent="0">
               <a:buNone/>
             </a:pPr>
             <a:r>
@@ -3683,7 +3637,7 @@
           <a:bodyPr wrap="square" rtlCol="0" anchor="ctr"/>
           <a:lstStyle/>
           <a:p>
-            <a:pPr indent="0" marL="0">
+            <a:pPr marL="0" indent="0">
               <a:buNone/>
             </a:pPr>
             <a:r>
@@ -3744,7 +3698,7 @@
           <a:bodyPr wrap="square" rtlCol="0" anchor="ctr"/>
           <a:lstStyle/>
           <a:p>
-            <a:pPr indent="0" marL="0">
+            <a:pPr marL="0" indent="0">
               <a:buNone/>
             </a:pPr>
             <a:r>
@@ -3783,7 +3737,7 @@
           <a:bodyPr wrap="square" rtlCol="0" anchor="ctr"/>
           <a:lstStyle/>
           <a:p>
-            <a:pPr indent="0" marL="0">
+            <a:pPr marL="0" indent="0">
               <a:buNone/>
             </a:pPr>
             <a:r>
@@ -3822,7 +3776,7 @@
           <a:bodyPr wrap="square" rtlCol="0" anchor="ctr"/>
           <a:lstStyle/>
           <a:p>
-            <a:pPr algn="r" indent="0" marL="0">
+            <a:pPr marL="0" indent="0" algn="r">
               <a:buNone/>
             </a:pPr>
             <a:r>
@@ -3856,6 +3810,7 @@
         <a:solidFill>
           <a:srgbClr val="F7F9FC"/>
         </a:solidFill>
+        <a:effectLst/>
       </p:bgPr>
     </p:bg>
     <p:spTree>
@@ -3893,7 +3848,7 @@
           <a:bodyPr wrap="square" rtlCol="0" anchor="ctr"/>
           <a:lstStyle/>
           <a:p>
-            <a:pPr indent="0" marL="0">
+            <a:pPr marL="0" indent="0">
               <a:buNone/>
             </a:pPr>
             <a:r>
@@ -3930,7 +3885,7 @@
           </a:solidFill>
           <a:ln/>
           <a:effectLst>
-            <a:outerShdw sx="100000" sy="100000" kx="0" ky="0" algn="bl" rotWithShape="0" blurRad="101600" dist="25400" dir="8100000">
+            <a:outerShdw blurRad="101600" dist="25400" dir="8100000" algn="bl" rotWithShape="0">
               <a:srgbClr val="000000">
                 <a:alpha val="11000"/>
               </a:srgbClr>
@@ -3959,7 +3914,7 @@
           <a:bodyPr wrap="square" lIns="0" tIns="0" rIns="0" bIns="0" rtlCol="0" anchor="ctr"/>
           <a:lstStyle/>
           <a:p>
-            <a:pPr algn="ctr" indent="0" marL="0">
+            <a:pPr marL="0" indent="0" algn="ctr">
               <a:buNone/>
             </a:pPr>
             <a:r>
@@ -3976,7 +3931,7 @@
             <a:endParaRPr lang="en-US" sz="1100" dirty="0"/>
           </a:p>
           <a:p>
-            <a:pPr algn="ctr" indent="0" marL="0">
+            <a:pPr marL="0" indent="0" algn="ctr">
               <a:buNone/>
             </a:pPr>
             <a:r>
@@ -4033,7 +3988,7 @@
           </a:solidFill>
           <a:ln/>
           <a:effectLst>
-            <a:outerShdw sx="100000" sy="100000" kx="0" ky="0" algn="bl" rotWithShape="0" blurRad="101600" dist="25400" dir="8100000">
+            <a:outerShdw blurRad="101600" dist="25400" dir="8100000" algn="bl" rotWithShape="0">
               <a:srgbClr val="000000">
                 <a:alpha val="11000"/>
               </a:srgbClr>
@@ -4062,7 +4017,7 @@
           <a:bodyPr wrap="square" lIns="0" tIns="0" rIns="0" bIns="0" rtlCol="0" anchor="ctr"/>
           <a:lstStyle/>
           <a:p>
-            <a:pPr algn="ctr" indent="0" marL="0">
+            <a:pPr marL="0" indent="0" algn="ctr">
               <a:buNone/>
             </a:pPr>
             <a:r>
@@ -4079,7 +4034,7 @@
             <a:endParaRPr lang="en-US" sz="1100" dirty="0"/>
           </a:p>
           <a:p>
-            <a:pPr algn="ctr" indent="0" marL="0">
+            <a:pPr marL="0" indent="0" algn="ctr">
               <a:buNone/>
             </a:pPr>
             <a:r>
@@ -4136,7 +4091,7 @@
           </a:solidFill>
           <a:ln/>
           <a:effectLst>
-            <a:outerShdw sx="100000" sy="100000" kx="0" ky="0" algn="bl" rotWithShape="0" blurRad="101600" dist="25400" dir="8100000">
+            <a:outerShdw blurRad="101600" dist="25400" dir="8100000" algn="bl" rotWithShape="0">
               <a:srgbClr val="000000">
                 <a:alpha val="11000"/>
               </a:srgbClr>
@@ -4165,7 +4120,7 @@
           <a:bodyPr wrap="square" lIns="0" tIns="0" rIns="0" bIns="0" rtlCol="0" anchor="ctr"/>
           <a:lstStyle/>
           <a:p>
-            <a:pPr algn="ctr" indent="0" marL="0">
+            <a:pPr marL="0" indent="0" algn="ctr">
               <a:buNone/>
             </a:pPr>
             <a:r>
@@ -4182,7 +4137,7 @@
             <a:endParaRPr lang="en-US" sz="1100" dirty="0"/>
           </a:p>
           <a:p>
-            <a:pPr algn="ctr" indent="0" marL="0">
+            <a:pPr marL="0" indent="0" algn="ctr">
               <a:buNone/>
             </a:pPr>
             <a:r>
@@ -4239,7 +4194,7 @@
           </a:solidFill>
           <a:ln/>
           <a:effectLst>
-            <a:outerShdw sx="100000" sy="100000" kx="0" ky="0" algn="bl" rotWithShape="0" blurRad="101600" dist="25400" dir="8100000">
+            <a:outerShdw blurRad="101600" dist="25400" dir="8100000" algn="bl" rotWithShape="0">
               <a:srgbClr val="000000">
                 <a:alpha val="11000"/>
               </a:srgbClr>
@@ -4268,7 +4223,7 @@
           <a:bodyPr wrap="square" lIns="0" tIns="0" rIns="0" bIns="0" rtlCol="0" anchor="ctr"/>
           <a:lstStyle/>
           <a:p>
-            <a:pPr algn="ctr" indent="0" marL="0">
+            <a:pPr marL="0" indent="0" algn="ctr">
               <a:buNone/>
             </a:pPr>
             <a:r>
@@ -4285,7 +4240,7 @@
             <a:endParaRPr lang="en-US" sz="1100" dirty="0"/>
           </a:p>
           <a:p>
-            <a:pPr algn="ctr" indent="0" marL="0">
+            <a:pPr marL="0" indent="0" algn="ctr">
               <a:buNone/>
             </a:pPr>
             <a:r>
@@ -4342,7 +4297,7 @@
           </a:solidFill>
           <a:ln/>
           <a:effectLst>
-            <a:outerShdw sx="100000" sy="100000" kx="0" ky="0" algn="bl" rotWithShape="0" blurRad="101600" dist="25400" dir="8100000">
+            <a:outerShdw blurRad="101600" dist="25400" dir="8100000" algn="bl" rotWithShape="0">
               <a:srgbClr val="000000">
                 <a:alpha val="11000"/>
               </a:srgbClr>
@@ -4371,7 +4326,7 @@
           <a:bodyPr wrap="square" lIns="0" tIns="0" rIns="0" bIns="0" rtlCol="0" anchor="ctr"/>
           <a:lstStyle/>
           <a:p>
-            <a:pPr algn="ctr" indent="0" marL="0">
+            <a:pPr marL="0" indent="0" algn="ctr">
               <a:buNone/>
             </a:pPr>
             <a:r>
@@ -4388,7 +4343,7 @@
             <a:endParaRPr lang="en-US" sz="1100" dirty="0"/>
           </a:p>
           <a:p>
-            <a:pPr algn="ctr" indent="0" marL="0">
+            <a:pPr marL="0" indent="0" algn="ctr">
               <a:buNone/>
             </a:pPr>
             <a:r>
@@ -4445,7 +4400,7 @@
           </a:solidFill>
           <a:ln/>
           <a:effectLst>
-            <a:outerShdw sx="100000" sy="100000" kx="0" ky="0" algn="bl" rotWithShape="0" blurRad="101600" dist="25400" dir="8100000">
+            <a:outerShdw blurRad="101600" dist="25400" dir="8100000" algn="bl" rotWithShape="0">
               <a:srgbClr val="000000">
                 <a:alpha val="11000"/>
               </a:srgbClr>
@@ -4474,7 +4429,7 @@
           <a:bodyPr wrap="square" lIns="0" tIns="0" rIns="0" bIns="0" rtlCol="0" anchor="ctr"/>
           <a:lstStyle/>
           <a:p>
-            <a:pPr algn="ctr" indent="0" marL="0">
+            <a:pPr marL="0" indent="0" algn="ctr">
               <a:buNone/>
             </a:pPr>
             <a:r>
@@ -4491,7 +4446,7 @@
             <a:endParaRPr lang="en-US" sz="1100" dirty="0"/>
           </a:p>
           <a:p>
-            <a:pPr algn="ctr" indent="0" marL="0">
+            <a:pPr marL="0" indent="0" algn="ctr">
               <a:buNone/>
             </a:pPr>
             <a:r>
@@ -4555,7 +4510,7 @@
           <a:bodyPr wrap="square" rtlCol="0" anchor="ctr"/>
           <a:lstStyle/>
           <a:p>
-            <a:pPr indent="0" marL="0">
+            <a:pPr marL="0" indent="0">
               <a:buNone/>
             </a:pPr>
             <a:r>
@@ -4594,7 +4549,7 @@
           <a:bodyPr wrap="square" rtlCol="0" anchor="ctr"/>
           <a:lstStyle/>
           <a:p>
-            <a:pPr indent="0" marL="0">
+            <a:pPr marL="0" indent="0">
               <a:buNone/>
             </a:pPr>
             <a:r>
@@ -4633,7 +4588,7 @@
           <a:bodyPr wrap="square" rtlCol="0" anchor="ctr"/>
           <a:lstStyle/>
           <a:p>
-            <a:pPr indent="0" marL="0">
+            <a:pPr marL="0" indent="0">
               <a:buNone/>
             </a:pPr>
             <a:r>
@@ -4697,7 +4652,7 @@
           <a:bodyPr wrap="square" rtlCol="0" anchor="ctr"/>
           <a:lstStyle/>
           <a:p>
-            <a:pPr indent="0" marL="0">
+            <a:pPr marL="0" indent="0">
               <a:buNone/>
             </a:pPr>
             <a:r>
@@ -4736,7 +4691,7 @@
           <a:bodyPr wrap="square" rtlCol="0" anchor="ctr"/>
           <a:lstStyle/>
           <a:p>
-            <a:pPr indent="0" marL="0">
+            <a:pPr marL="0" indent="0">
               <a:buNone/>
             </a:pPr>
             <a:r>
@@ -4775,7 +4730,7 @@
           <a:bodyPr wrap="square" rtlCol="0" anchor="ctr"/>
           <a:lstStyle/>
           <a:p>
-            <a:pPr indent="0" marL="0">
+            <a:pPr marL="0" indent="0">
               <a:buNone/>
             </a:pPr>
             <a:r>
@@ -4839,7 +4794,7 @@
           <a:bodyPr wrap="square" rtlCol="0" anchor="ctr"/>
           <a:lstStyle/>
           <a:p>
-            <a:pPr indent="0" marL="0">
+            <a:pPr marL="0" indent="0">
               <a:buNone/>
             </a:pPr>
             <a:r>
@@ -4878,7 +4833,7 @@
           <a:bodyPr wrap="square" rtlCol="0" anchor="ctr"/>
           <a:lstStyle/>
           <a:p>
-            <a:pPr indent="0" marL="0">
+            <a:pPr marL="0" indent="0">
               <a:buNone/>
             </a:pPr>
             <a:r>
@@ -4917,7 +4872,7 @@
           <a:bodyPr wrap="square" rtlCol="0" anchor="ctr"/>
           <a:lstStyle/>
           <a:p>
-            <a:pPr indent="0" marL="0">
+            <a:pPr marL="0" indent="0">
               <a:buNone/>
             </a:pPr>
             <a:r>
@@ -4981,7 +4936,7 @@
           <a:bodyPr wrap="square" rtlCol="0" anchor="ctr"/>
           <a:lstStyle/>
           <a:p>
-            <a:pPr indent="0" marL="0">
+            <a:pPr marL="0" indent="0">
               <a:buNone/>
             </a:pPr>
             <a:r>
@@ -5020,7 +4975,7 @@
           <a:bodyPr wrap="square" rtlCol="0" anchor="ctr"/>
           <a:lstStyle/>
           <a:p>
-            <a:pPr indent="0" marL="0">
+            <a:pPr marL="0" indent="0">
               <a:buNone/>
             </a:pPr>
             <a:r>
@@ -5059,7 +5014,7 @@
           <a:bodyPr wrap="square" rtlCol="0" anchor="ctr"/>
           <a:lstStyle/>
           <a:p>
-            <a:pPr indent="0" marL="0">
+            <a:pPr marL="0" indent="0">
               <a:buNone/>
             </a:pPr>
             <a:r>
@@ -5123,7 +5078,7 @@
           <a:bodyPr wrap="square" rtlCol="0" anchor="ctr"/>
           <a:lstStyle/>
           <a:p>
-            <a:pPr indent="0" marL="0">
+            <a:pPr marL="0" indent="0">
               <a:buNone/>
             </a:pPr>
             <a:r>
@@ -5162,7 +5117,7 @@
           <a:bodyPr wrap="square" rtlCol="0" anchor="ctr"/>
           <a:lstStyle/>
           <a:p>
-            <a:pPr indent="0" marL="0">
+            <a:pPr marL="0" indent="0">
               <a:buNone/>
             </a:pPr>
             <a:r>
@@ -5201,7 +5156,7 @@
           <a:bodyPr wrap="square" rtlCol="0" anchor="ctr"/>
           <a:lstStyle/>
           <a:p>
-            <a:pPr indent="0" marL="0">
+            <a:pPr marL="0" indent="0">
               <a:buNone/>
             </a:pPr>
             <a:r>
@@ -5235,6 +5190,7 @@
         <a:solidFill>
           <a:srgbClr val="F7F9FC"/>
         </a:solidFill>
+        <a:effectLst/>
       </p:bgPr>
     </p:bg>
     <p:spTree>
@@ -5272,7 +5228,7 @@
           <a:bodyPr wrap="square" rtlCol="0" anchor="ctr"/>
           <a:lstStyle/>
           <a:p>
-            <a:pPr indent="0" marL="0">
+            <a:pPr marL="0" indent="0">
               <a:buNone/>
             </a:pPr>
             <a:r>
@@ -5314,7 +5270,7 @@
             <a:prstDash val="solid"/>
           </a:ln>
           <a:effectLst>
-            <a:outerShdw sx="100000" sy="100000" kx="0" ky="0" algn="bl" rotWithShape="0" blurRad="101600" dist="25400" dir="8100000">
+            <a:outerShdw blurRad="101600" dist="25400" dir="8100000" algn="bl" rotWithShape="0">
               <a:srgbClr val="000000">
                 <a:alpha val="11000"/>
               </a:srgbClr>
@@ -5363,7 +5319,7 @@
           <a:bodyPr wrap="square" rtlCol="0" anchor="ctr"/>
           <a:lstStyle/>
           <a:p>
-            <a:pPr indent="0" marL="0">
+            <a:pPr marL="0" indent="0">
               <a:buNone/>
             </a:pPr>
             <a:r>
@@ -5402,7 +5358,7 @@
           <a:bodyPr wrap="square" rtlCol="0" anchor="ctr"/>
           <a:lstStyle/>
           <a:p>
-            <a:pPr indent="0" marL="0">
+            <a:pPr marL="0" indent="0">
               <a:buNone/>
             </a:pPr>
             <a:r>
@@ -5441,7 +5397,7 @@
           <a:bodyPr wrap="square" rtlCol="0" anchor="t"/>
           <a:lstStyle/>
           <a:p>
-            <a:pPr indent="0" marL="0">
+            <a:pPr marL="0" indent="0">
               <a:buNone/>
             </a:pPr>
             <a:r>
@@ -5480,7 +5436,7 @@
           <a:bodyPr wrap="square" rtlCol="0" anchor="t"/>
           <a:lstStyle/>
           <a:p>
-            <a:pPr indent="0" marL="0">
+            <a:pPr marL="0" indent="0">
               <a:buNone/>
             </a:pPr>
             <a:r>
@@ -5519,7 +5475,7 @@
           <a:bodyPr wrap="square" rtlCol="0" anchor="t"/>
           <a:lstStyle/>
           <a:p>
-            <a:pPr indent="0" marL="0">
+            <a:pPr marL="0" indent="0">
               <a:buNone/>
             </a:pPr>
             <a:r>
@@ -5558,7 +5514,7 @@
           <a:bodyPr wrap="square" rtlCol="0" anchor="t"/>
           <a:lstStyle/>
           <a:p>
-            <a:pPr indent="0" marL="0">
+            <a:pPr marL="0" indent="0">
               <a:buNone/>
             </a:pPr>
             <a:r>
@@ -5600,7 +5556,7 @@
             <a:prstDash val="solid"/>
           </a:ln>
           <a:effectLst>
-            <a:outerShdw sx="100000" sy="100000" kx="0" ky="0" algn="bl" rotWithShape="0" blurRad="101600" dist="25400" dir="8100000">
+            <a:outerShdw blurRad="101600" dist="25400" dir="8100000" algn="bl" rotWithShape="0">
               <a:srgbClr val="000000">
                 <a:alpha val="11000"/>
               </a:srgbClr>
@@ -5649,7 +5605,7 @@
           <a:bodyPr wrap="square" rtlCol="0" anchor="ctr"/>
           <a:lstStyle/>
           <a:p>
-            <a:pPr indent="0" marL="0">
+            <a:pPr marL="0" indent="0">
               <a:buNone/>
             </a:pPr>
             <a:r>
@@ -5688,7 +5644,7 @@
           <a:bodyPr wrap="square" rtlCol="0" anchor="ctr"/>
           <a:lstStyle/>
           <a:p>
-            <a:pPr indent="0" marL="0">
+            <a:pPr marL="0" indent="0">
               <a:buNone/>
             </a:pPr>
             <a:r>
@@ -5727,7 +5683,7 @@
           <a:bodyPr wrap="square" rtlCol="0" anchor="t"/>
           <a:lstStyle/>
           <a:p>
-            <a:pPr indent="0" marL="0">
+            <a:pPr marL="0" indent="0">
               <a:buNone/>
             </a:pPr>
             <a:r>
@@ -5766,7 +5722,7 @@
           <a:bodyPr wrap="square" rtlCol="0" anchor="t"/>
           <a:lstStyle/>
           <a:p>
-            <a:pPr indent="0" marL="0">
+            <a:pPr marL="0" indent="0">
               <a:buNone/>
             </a:pPr>
             <a:r>
@@ -5805,7 +5761,7 @@
           <a:bodyPr wrap="square" rtlCol="0" anchor="t"/>
           <a:lstStyle/>
           <a:p>
-            <a:pPr indent="0" marL="0">
+            <a:pPr marL="0" indent="0">
               <a:buNone/>
             </a:pPr>
             <a:r>
@@ -5844,7 +5800,7 @@
           <a:bodyPr wrap="square" rtlCol="0" anchor="t"/>
           <a:lstStyle/>
           <a:p>
-            <a:pPr indent="0" marL="0">
+            <a:pPr marL="0" indent="0">
               <a:buNone/>
             </a:pPr>
             <a:r>
@@ -5883,7 +5839,7 @@
           <a:bodyPr wrap="square" rtlCol="0" anchor="ctr"/>
           <a:lstStyle/>
           <a:p>
-            <a:pPr algn="ctr" indent="0" marL="0">
+            <a:pPr marL="0" indent="0" algn="ctr">
               <a:buNone/>
             </a:pPr>
             <a:r>
@@ -5917,6 +5873,7 @@
         <a:solidFill>
           <a:srgbClr val="1B2E4B"/>
         </a:solidFill>
+        <a:effectLst/>
       </p:bgPr>
     </p:bg>
     <p:spTree>
@@ -6304,7 +6261,7 @@
           <a:bodyPr wrap="square" lIns="0" tIns="0" rIns="0" bIns="0" rtlCol="0" anchor="ctr"/>
           <a:lstStyle/>
           <a:p>
-            <a:pPr algn="ctr" indent="0" marL="0">
+            <a:pPr marL="0" indent="0" algn="ctr">
               <a:buNone/>
             </a:pPr>
             <a:r>
@@ -6340,7 +6297,7 @@
           <a:bodyPr wrap="square" rtlCol="0" anchor="ctr"/>
           <a:lstStyle/>
           <a:p>
-            <a:pPr indent="0" marL="0">
+            <a:pPr marL="0" indent="0">
               <a:buNone/>
             </a:pPr>
             <a:r>
@@ -6379,7 +6336,7 @@
           <a:bodyPr wrap="square" rtlCol="0" anchor="ctr"/>
           <a:lstStyle/>
           <a:p>
-            <a:pPr indent="0" marL="0">
+            <a:pPr marL="0" indent="0">
               <a:buNone/>
             </a:pPr>
             <a:r>
@@ -6435,6 +6392,7 @@
         <a:solidFill>
           <a:srgbClr val="F7F9FC"/>
         </a:solidFill>
+        <a:effectLst/>
       </p:bgPr>
     </p:bg>
     <p:spTree>
@@ -6472,7 +6430,7 @@
           <a:bodyPr wrap="square" rtlCol="0" anchor="ctr"/>
           <a:lstStyle/>
           <a:p>
-            <a:pPr indent="0" marL="0">
+            <a:pPr marL="0" indent="0">
               <a:buNone/>
             </a:pPr>
             <a:r>
@@ -6511,7 +6469,7 @@
           <a:bodyPr wrap="square" rtlCol="0" anchor="ctr"/>
           <a:lstStyle/>
           <a:p>
-            <a:pPr indent="0" marL="0">
+            <a:pPr marL="0" indent="0">
               <a:buNone/>
             </a:pPr>
             <a:r>
@@ -6553,7 +6511,7 @@
             <a:prstDash val="solid"/>
           </a:ln>
           <a:effectLst>
-            <a:outerShdw sx="100000" sy="100000" kx="0" ky="0" algn="bl" rotWithShape="0" blurRad="101600" dist="25400" dir="8100000">
+            <a:outerShdw blurRad="101600" dist="25400" dir="8100000" algn="bl" rotWithShape="0">
               <a:srgbClr val="000000">
                 <a:alpha val="11000"/>
               </a:srgbClr>
@@ -6622,7 +6580,7 @@
           <a:bodyPr wrap="square" lIns="0" tIns="0" rIns="0" bIns="0" rtlCol="0" anchor="ctr"/>
           <a:lstStyle/>
           <a:p>
-            <a:pPr algn="ctr" indent="0" marL="0">
+            <a:pPr marL="0" indent="0" algn="ctr">
               <a:buNone/>
             </a:pPr>
             <a:r>
@@ -6658,7 +6616,7 @@
           <a:bodyPr wrap="square" rtlCol="0" anchor="ctr"/>
           <a:lstStyle/>
           <a:p>
-            <a:pPr indent="0" marL="0">
+            <a:pPr marL="0" indent="0">
               <a:buNone/>
             </a:pPr>
             <a:r>
@@ -6697,7 +6655,7 @@
           <a:bodyPr wrap="square" rtlCol="0" anchor="ctr"/>
           <a:lstStyle/>
           <a:p>
-            <a:pPr indent="0" marL="0">
+            <a:pPr marL="0" indent="0">
               <a:buNone/>
             </a:pPr>
             <a:r>
@@ -6739,7 +6697,7 @@
             <a:prstDash val="solid"/>
           </a:ln>
           <a:effectLst>
-            <a:outerShdw sx="100000" sy="100000" kx="0" ky="0" algn="bl" rotWithShape="0" blurRad="101600" dist="25400" dir="8100000">
+            <a:outerShdw blurRad="101600" dist="25400" dir="8100000" algn="bl" rotWithShape="0">
               <a:srgbClr val="000000">
                 <a:alpha val="11000"/>
               </a:srgbClr>
@@ -6808,7 +6766,7 @@
           <a:bodyPr wrap="square" lIns="0" tIns="0" rIns="0" bIns="0" rtlCol="0" anchor="ctr"/>
           <a:lstStyle/>
           <a:p>
-            <a:pPr algn="ctr" indent="0" marL="0">
+            <a:pPr marL="0" indent="0" algn="ctr">
               <a:buNone/>
             </a:pPr>
             <a:r>
@@ -6844,7 +6802,7 @@
           <a:bodyPr wrap="square" rtlCol="0" anchor="ctr"/>
           <a:lstStyle/>
           <a:p>
-            <a:pPr indent="0" marL="0">
+            <a:pPr marL="0" indent="0">
               <a:buNone/>
             </a:pPr>
             <a:r>
@@ -6883,7 +6841,7 @@
           <a:bodyPr wrap="square" rtlCol="0" anchor="ctr"/>
           <a:lstStyle/>
           <a:p>
-            <a:pPr indent="0" marL="0">
+            <a:pPr marL="0" indent="0">
               <a:buNone/>
             </a:pPr>
             <a:r>
@@ -6925,7 +6883,7 @@
             <a:prstDash val="solid"/>
           </a:ln>
           <a:effectLst>
-            <a:outerShdw sx="100000" sy="100000" kx="0" ky="0" algn="bl" rotWithShape="0" blurRad="101600" dist="25400" dir="8100000">
+            <a:outerShdw blurRad="101600" dist="25400" dir="8100000" algn="bl" rotWithShape="0">
               <a:srgbClr val="000000">
                 <a:alpha val="11000"/>
               </a:srgbClr>
@@ -6994,7 +6952,7 @@
           <a:bodyPr wrap="square" lIns="0" tIns="0" rIns="0" bIns="0" rtlCol="0" anchor="ctr"/>
           <a:lstStyle/>
           <a:p>
-            <a:pPr algn="ctr" indent="0" marL="0">
+            <a:pPr marL="0" indent="0" algn="ctr">
               <a:buNone/>
             </a:pPr>
             <a:r>
@@ -7030,7 +6988,7 @@
           <a:bodyPr wrap="square" rtlCol="0" anchor="ctr"/>
           <a:lstStyle/>
           <a:p>
-            <a:pPr indent="0" marL="0">
+            <a:pPr marL="0" indent="0">
               <a:buNone/>
             </a:pPr>
             <a:r>
@@ -7069,7 +7027,7 @@
           <a:bodyPr wrap="square" rtlCol="0" anchor="ctr"/>
           <a:lstStyle/>
           <a:p>
-            <a:pPr indent="0" marL="0">
+            <a:pPr marL="0" indent="0">
               <a:buNone/>
             </a:pPr>
             <a:r>
@@ -7111,7 +7069,7 @@
             <a:prstDash val="solid"/>
           </a:ln>
           <a:effectLst>
-            <a:outerShdw sx="100000" sy="100000" kx="0" ky="0" algn="bl" rotWithShape="0" blurRad="101600" dist="25400" dir="8100000">
+            <a:outerShdw blurRad="101600" dist="25400" dir="8100000" algn="bl" rotWithShape="0">
               <a:srgbClr val="000000">
                 <a:alpha val="11000"/>
               </a:srgbClr>
@@ -7180,7 +7138,7 @@
           <a:bodyPr wrap="square" lIns="0" tIns="0" rIns="0" bIns="0" rtlCol="0" anchor="ctr"/>
           <a:lstStyle/>
           <a:p>
-            <a:pPr algn="ctr" indent="0" marL="0">
+            <a:pPr marL="0" indent="0" algn="ctr">
               <a:buNone/>
             </a:pPr>
             <a:r>
@@ -7216,7 +7174,7 @@
           <a:bodyPr wrap="square" rtlCol="0" anchor="ctr"/>
           <a:lstStyle/>
           <a:p>
-            <a:pPr indent="0" marL="0">
+            <a:pPr marL="0" indent="0">
               <a:buNone/>
             </a:pPr>
             <a:r>
@@ -7255,7 +7213,7 @@
           <a:bodyPr wrap="square" rtlCol="0" anchor="ctr"/>
           <a:lstStyle/>
           <a:p>
-            <a:pPr indent="0" marL="0">
+            <a:pPr marL="0" indent="0">
               <a:buNone/>
             </a:pPr>
             <a:r>
@@ -7297,7 +7255,7 @@
             <a:prstDash val="solid"/>
           </a:ln>
           <a:effectLst>
-            <a:outerShdw sx="100000" sy="100000" kx="0" ky="0" algn="bl" rotWithShape="0" blurRad="101600" dist="25400" dir="8100000">
+            <a:outerShdw blurRad="101600" dist="25400" dir="8100000" algn="bl" rotWithShape="0">
               <a:srgbClr val="000000">
                 <a:alpha val="11000"/>
               </a:srgbClr>
@@ -7366,7 +7324,7 @@
           <a:bodyPr wrap="square" lIns="0" tIns="0" rIns="0" bIns="0" rtlCol="0" anchor="ctr"/>
           <a:lstStyle/>
           <a:p>
-            <a:pPr algn="ctr" indent="0" marL="0">
+            <a:pPr marL="0" indent="0" algn="ctr">
               <a:buNone/>
             </a:pPr>
             <a:r>
@@ -7402,7 +7360,7 @@
           <a:bodyPr wrap="square" rtlCol="0" anchor="ctr"/>
           <a:lstStyle/>
           <a:p>
-            <a:pPr indent="0" marL="0">
+            <a:pPr marL="0" indent="0">
               <a:buNone/>
             </a:pPr>
             <a:r>
@@ -7441,7 +7399,7 @@
           <a:bodyPr wrap="square" rtlCol="0" anchor="ctr"/>
           <a:lstStyle/>
           <a:p>
-            <a:pPr indent="0" marL="0">
+            <a:pPr marL="0" indent="0">
               <a:buNone/>
             </a:pPr>
             <a:r>
@@ -7483,7 +7441,7 @@
             <a:prstDash val="solid"/>
           </a:ln>
           <a:effectLst>
-            <a:outerShdw sx="100000" sy="100000" kx="0" ky="0" algn="bl" rotWithShape="0" blurRad="101600" dist="25400" dir="8100000">
+            <a:outerShdw blurRad="101600" dist="25400" dir="8100000" algn="bl" rotWithShape="0">
               <a:srgbClr val="000000">
                 <a:alpha val="11000"/>
               </a:srgbClr>
@@ -7552,7 +7510,7 @@
           <a:bodyPr wrap="square" lIns="0" tIns="0" rIns="0" bIns="0" rtlCol="0" anchor="ctr"/>
           <a:lstStyle/>
           <a:p>
-            <a:pPr algn="ctr" indent="0" marL="0">
+            <a:pPr marL="0" indent="0" algn="ctr">
               <a:buNone/>
             </a:pPr>
             <a:r>
@@ -7588,7 +7546,7 @@
           <a:bodyPr wrap="square" rtlCol="0" anchor="ctr"/>
           <a:lstStyle/>
           <a:p>
-            <a:pPr indent="0" marL="0">
+            <a:pPr marL="0" indent="0">
               <a:buNone/>
             </a:pPr>
             <a:r>
@@ -7627,7 +7585,7 @@
           <a:bodyPr wrap="square" rtlCol="0" anchor="ctr"/>
           <a:lstStyle/>
           <a:p>
-            <a:pPr indent="0" marL="0">
+            <a:pPr marL="0" indent="0">
               <a:buNone/>
             </a:pPr>
             <a:r>
@@ -7669,7 +7627,7 @@
             <a:prstDash val="solid"/>
           </a:ln>
           <a:effectLst>
-            <a:outerShdw sx="100000" sy="100000" kx="0" ky="0" algn="bl" rotWithShape="0" blurRad="101600" dist="25400" dir="8100000">
+            <a:outerShdw blurRad="101600" dist="25400" dir="8100000" algn="bl" rotWithShape="0">
               <a:srgbClr val="000000">
                 <a:alpha val="11000"/>
               </a:srgbClr>
@@ -7738,7 +7696,7 @@
           <a:bodyPr wrap="square" lIns="0" tIns="0" rIns="0" bIns="0" rtlCol="0" anchor="ctr"/>
           <a:lstStyle/>
           <a:p>
-            <a:pPr algn="ctr" indent="0" marL="0">
+            <a:pPr marL="0" indent="0" algn="ctr">
               <a:buNone/>
             </a:pPr>
             <a:r>
@@ -7774,7 +7732,7 @@
           <a:bodyPr wrap="square" rtlCol="0" anchor="ctr"/>
           <a:lstStyle/>
           <a:p>
-            <a:pPr indent="0" marL="0">
+            <a:pPr marL="0" indent="0">
               <a:buNone/>
             </a:pPr>
             <a:r>
@@ -7813,7 +7771,7 @@
           <a:bodyPr wrap="square" rtlCol="0" anchor="ctr"/>
           <a:lstStyle/>
           <a:p>
-            <a:pPr indent="0" marL="0">
+            <a:pPr marL="0" indent="0">
               <a:buNone/>
             </a:pPr>
             <a:r>
@@ -7847,6 +7805,7 @@
         <a:solidFill>
           <a:srgbClr val="F7F9FC"/>
         </a:solidFill>
+        <a:effectLst/>
       </p:bgPr>
     </p:bg>
     <p:spTree>
@@ -7884,7 +7843,7 @@
           <a:bodyPr wrap="square" rtlCol="0" anchor="ctr"/>
           <a:lstStyle/>
           <a:p>
-            <a:pPr indent="0" marL="0">
+            <a:pPr marL="0" indent="0">
               <a:buNone/>
             </a:pPr>
             <a:r>
@@ -7926,7 +7885,7 @@
             <a:prstDash val="solid"/>
           </a:ln>
           <a:effectLst>
-            <a:outerShdw sx="100000" sy="100000" kx="0" ky="0" algn="bl" rotWithShape="0" blurRad="101600" dist="25400" dir="8100000">
+            <a:outerShdw blurRad="101600" dist="25400" dir="8100000" algn="bl" rotWithShape="0">
               <a:srgbClr val="000000">
                 <a:alpha val="11000"/>
               </a:srgbClr>
@@ -7975,7 +7934,7 @@
           <a:bodyPr wrap="square" rtlCol="0" anchor="ctr"/>
           <a:lstStyle/>
           <a:p>
-            <a:pPr indent="0" marL="0">
+            <a:pPr marL="0" indent="0">
               <a:buNone/>
             </a:pPr>
             <a:r>
@@ -7992,7 +7951,7 @@
             <a:endParaRPr lang="en-US" sz="1200" dirty="0"/>
           </a:p>
           <a:p>
-            <a:pPr indent="0" marL="0">
+            <a:pPr marL="0" indent="0">
               <a:buNone/>
             </a:pPr>
             <a:r>
@@ -8031,7 +7990,7 @@
           <a:bodyPr wrap="square" rtlCol="0" anchor="ctr"/>
           <a:lstStyle/>
           <a:p>
-            <a:pPr indent="0" marL="0">
+            <a:pPr marL="0" indent="0">
               <a:buNone/>
             </a:pPr>
             <a:r>
@@ -8070,7 +8029,7 @@
           <a:bodyPr wrap="square" rtlCol="0" anchor="ctr"/>
           <a:lstStyle/>
           <a:p>
-            <a:pPr indent="0" marL="0">
+            <a:pPr marL="0" indent="0">
               <a:buNone/>
             </a:pPr>
             <a:r>
@@ -8112,7 +8071,7 @@
             <a:prstDash val="solid"/>
           </a:ln>
           <a:effectLst>
-            <a:outerShdw sx="100000" sy="100000" kx="0" ky="0" algn="bl" rotWithShape="0" blurRad="101600" dist="25400" dir="8100000">
+            <a:outerShdw blurRad="101600" dist="25400" dir="8100000" algn="bl" rotWithShape="0">
               <a:srgbClr val="000000">
                 <a:alpha val="11000"/>
               </a:srgbClr>
@@ -8161,7 +8120,7 @@
           <a:bodyPr wrap="square" rtlCol="0" anchor="ctr"/>
           <a:lstStyle/>
           <a:p>
-            <a:pPr indent="0" marL="0">
+            <a:pPr marL="0" indent="0">
               <a:buNone/>
             </a:pPr>
             <a:r>
@@ -8178,7 +8137,7 @@
             <a:endParaRPr lang="en-US" sz="1200" dirty="0"/>
           </a:p>
           <a:p>
-            <a:pPr indent="0" marL="0">
+            <a:pPr marL="0" indent="0">
               <a:buNone/>
             </a:pPr>
             <a:r>
@@ -8217,7 +8176,7 @@
           <a:bodyPr wrap="square" rtlCol="0" anchor="ctr"/>
           <a:lstStyle/>
           <a:p>
-            <a:pPr indent="0" marL="0">
+            <a:pPr marL="0" indent="0">
               <a:buNone/>
             </a:pPr>
             <a:r>
@@ -8256,7 +8215,7 @@
           <a:bodyPr wrap="square" rtlCol="0" anchor="ctr"/>
           <a:lstStyle/>
           <a:p>
-            <a:pPr indent="0" marL="0">
+            <a:pPr marL="0" indent="0">
               <a:buNone/>
             </a:pPr>
             <a:r>
@@ -8298,7 +8257,7 @@
             <a:prstDash val="solid"/>
           </a:ln>
           <a:effectLst>
-            <a:outerShdw sx="100000" sy="100000" kx="0" ky="0" algn="bl" rotWithShape="0" blurRad="101600" dist="25400" dir="8100000">
+            <a:outerShdw blurRad="101600" dist="25400" dir="8100000" algn="bl" rotWithShape="0">
               <a:srgbClr val="000000">
                 <a:alpha val="11000"/>
               </a:srgbClr>
@@ -8347,7 +8306,7 @@
           <a:bodyPr wrap="square" rtlCol="0" anchor="ctr"/>
           <a:lstStyle/>
           <a:p>
-            <a:pPr indent="0" marL="0">
+            <a:pPr marL="0" indent="0">
               <a:buNone/>
             </a:pPr>
             <a:r>
@@ -8364,7 +8323,7 @@
             <a:endParaRPr lang="en-US" sz="1200" dirty="0"/>
           </a:p>
           <a:p>
-            <a:pPr indent="0" marL="0">
+            <a:pPr marL="0" indent="0">
               <a:buNone/>
             </a:pPr>
             <a:r>
@@ -8403,7 +8362,7 @@
           <a:bodyPr wrap="square" rtlCol="0" anchor="ctr"/>
           <a:lstStyle/>
           <a:p>
-            <a:pPr indent="0" marL="0">
+            <a:pPr marL="0" indent="0">
               <a:buNone/>
             </a:pPr>
             <a:r>
@@ -8442,7 +8401,7 @@
           <a:bodyPr wrap="square" rtlCol="0" anchor="ctr"/>
           <a:lstStyle/>
           <a:p>
-            <a:pPr indent="0" marL="0">
+            <a:pPr marL="0" indent="0">
               <a:buNone/>
             </a:pPr>
             <a:r>
@@ -8484,7 +8443,7 @@
             <a:prstDash val="solid"/>
           </a:ln>
           <a:effectLst>
-            <a:outerShdw sx="100000" sy="100000" kx="0" ky="0" algn="bl" rotWithShape="0" blurRad="101600" dist="25400" dir="8100000">
+            <a:outerShdw blurRad="101600" dist="25400" dir="8100000" algn="bl" rotWithShape="0">
               <a:srgbClr val="000000">
                 <a:alpha val="11000"/>
               </a:srgbClr>
@@ -8533,7 +8492,7 @@
           <a:bodyPr wrap="square" rtlCol="0" anchor="ctr"/>
           <a:lstStyle/>
           <a:p>
-            <a:pPr indent="0" marL="0">
+            <a:pPr marL="0" indent="0">
               <a:buNone/>
             </a:pPr>
             <a:r>
@@ -8550,7 +8509,7 @@
             <a:endParaRPr lang="en-US" sz="1200" dirty="0"/>
           </a:p>
           <a:p>
-            <a:pPr indent="0" marL="0">
+            <a:pPr marL="0" indent="0">
               <a:buNone/>
             </a:pPr>
             <a:r>
@@ -8589,7 +8548,7 @@
           <a:bodyPr wrap="square" rtlCol="0" anchor="ctr"/>
           <a:lstStyle/>
           <a:p>
-            <a:pPr indent="0" marL="0">
+            <a:pPr marL="0" indent="0">
               <a:buNone/>
             </a:pPr>
             <a:r>
@@ -8628,7 +8587,7 @@
           <a:bodyPr wrap="square" rtlCol="0" anchor="ctr"/>
           <a:lstStyle/>
           <a:p>
-            <a:pPr indent="0" marL="0">
+            <a:pPr marL="0" indent="0">
               <a:buNone/>
             </a:pPr>
             <a:r>
@@ -8662,6 +8621,7 @@
         <a:solidFill>
           <a:srgbClr val="F7F9FC"/>
         </a:solidFill>
+        <a:effectLst/>
       </p:bgPr>
     </p:bg>
     <p:spTree>
@@ -8699,7 +8659,7 @@
           <a:bodyPr wrap="square" rtlCol="0" anchor="ctr"/>
           <a:lstStyle/>
           <a:p>
-            <a:pPr indent="0" marL="0">
+            <a:pPr marL="0" indent="0">
               <a:buNone/>
             </a:pPr>
             <a:r>
@@ -8741,7 +8701,7 @@
             <a:prstDash val="solid"/>
           </a:ln>
           <a:effectLst>
-            <a:outerShdw sx="100000" sy="100000" kx="0" ky="0" algn="bl" rotWithShape="0" blurRad="101600" dist="25400" dir="8100000">
+            <a:outerShdw blurRad="101600" dist="25400" dir="8100000" algn="bl" rotWithShape="0">
               <a:srgbClr val="000000">
                 <a:alpha val="11000"/>
               </a:srgbClr>
@@ -8810,7 +8770,7 @@
           <a:bodyPr wrap="square" lIns="0" tIns="0" rIns="0" bIns="0" rtlCol="0" anchor="ctr"/>
           <a:lstStyle/>
           <a:p>
-            <a:pPr algn="ctr" indent="0" marL="0">
+            <a:pPr marL="0" indent="0" algn="ctr">
               <a:buNone/>
             </a:pPr>
             <a:r>
@@ -8846,7 +8806,7 @@
           <a:bodyPr wrap="square" rtlCol="0" anchor="ctr"/>
           <a:lstStyle/>
           <a:p>
-            <a:pPr indent="0" marL="0">
+            <a:pPr marL="0" indent="0">
               <a:buNone/>
             </a:pPr>
             <a:r>
@@ -8885,7 +8845,7 @@
           <a:bodyPr wrap="square" rtlCol="0" anchor="ctr"/>
           <a:lstStyle/>
           <a:p>
-            <a:pPr indent="0" marL="0">
+            <a:pPr marL="0" indent="0">
               <a:buNone/>
             </a:pPr>
             <a:r>
@@ -8924,7 +8884,7 @@
           <a:bodyPr wrap="square" rtlCol="0" anchor="ctr"/>
           <a:lstStyle/>
           <a:p>
-            <a:pPr indent="0" marL="0">
+            <a:pPr marL="0" indent="0">
               <a:buNone/>
             </a:pPr>
             <a:r>
@@ -8966,7 +8926,7 @@
             <a:prstDash val="solid"/>
           </a:ln>
           <a:effectLst>
-            <a:outerShdw sx="100000" sy="100000" kx="0" ky="0" algn="bl" rotWithShape="0" blurRad="101600" dist="25400" dir="8100000">
+            <a:outerShdw blurRad="101600" dist="25400" dir="8100000" algn="bl" rotWithShape="0">
               <a:srgbClr val="000000">
                 <a:alpha val="11000"/>
               </a:srgbClr>
@@ -9035,7 +8995,7 @@
           <a:bodyPr wrap="square" lIns="0" tIns="0" rIns="0" bIns="0" rtlCol="0" anchor="ctr"/>
           <a:lstStyle/>
           <a:p>
-            <a:pPr algn="ctr" indent="0" marL="0">
+            <a:pPr marL="0" indent="0" algn="ctr">
               <a:buNone/>
             </a:pPr>
             <a:r>
@@ -9071,7 +9031,7 @@
           <a:bodyPr wrap="square" rtlCol="0" anchor="ctr"/>
           <a:lstStyle/>
           <a:p>
-            <a:pPr indent="0" marL="0">
+            <a:pPr marL="0" indent="0">
               <a:buNone/>
             </a:pPr>
             <a:r>
@@ -9110,7 +9070,7 @@
           <a:bodyPr wrap="square" rtlCol="0" anchor="ctr"/>
           <a:lstStyle/>
           <a:p>
-            <a:pPr indent="0" marL="0">
+            <a:pPr marL="0" indent="0">
               <a:buNone/>
             </a:pPr>
             <a:r>
@@ -9149,7 +9109,7 @@
           <a:bodyPr wrap="square" rtlCol="0" anchor="ctr"/>
           <a:lstStyle/>
           <a:p>
-            <a:pPr indent="0" marL="0">
+            <a:pPr marL="0" indent="0">
               <a:buNone/>
             </a:pPr>
             <a:r>
@@ -9191,7 +9151,7 @@
             <a:prstDash val="solid"/>
           </a:ln>
           <a:effectLst>
-            <a:outerShdw sx="100000" sy="100000" kx="0" ky="0" algn="bl" rotWithShape="0" blurRad="101600" dist="25400" dir="8100000">
+            <a:outerShdw blurRad="101600" dist="25400" dir="8100000" algn="bl" rotWithShape="0">
               <a:srgbClr val="000000">
                 <a:alpha val="11000"/>
               </a:srgbClr>
@@ -9260,7 +9220,7 @@
           <a:bodyPr wrap="square" lIns="0" tIns="0" rIns="0" bIns="0" rtlCol="0" anchor="ctr"/>
           <a:lstStyle/>
           <a:p>
-            <a:pPr algn="ctr" indent="0" marL="0">
+            <a:pPr marL="0" indent="0" algn="ctr">
               <a:buNone/>
             </a:pPr>
             <a:r>
@@ -9296,7 +9256,7 @@
           <a:bodyPr wrap="square" rtlCol="0" anchor="ctr"/>
           <a:lstStyle/>
           <a:p>
-            <a:pPr indent="0" marL="0">
+            <a:pPr marL="0" indent="0">
               <a:buNone/>
             </a:pPr>
             <a:r>
@@ -9335,7 +9295,7 @@
           <a:bodyPr wrap="square" rtlCol="0" anchor="ctr"/>
           <a:lstStyle/>
           <a:p>
-            <a:pPr indent="0" marL="0">
+            <a:pPr marL="0" indent="0">
               <a:buNone/>
             </a:pPr>
             <a:r>
@@ -9374,7 +9334,7 @@
           <a:bodyPr wrap="square" rtlCol="0" anchor="ctr"/>
           <a:lstStyle/>
           <a:p>
-            <a:pPr indent="0" marL="0">
+            <a:pPr marL="0" indent="0">
               <a:buNone/>
             </a:pPr>
             <a:r>
@@ -9413,7 +9373,7 @@
           <a:bodyPr wrap="square" rtlCol="0" anchor="ctr"/>
           <a:lstStyle/>
           <a:p>
-            <a:pPr algn="ctr" indent="0" marL="0">
+            <a:pPr marL="0" indent="0" algn="ctr">
               <a:buNone/>
             </a:pPr>
             <a:r>
@@ -9447,6 +9407,7 @@
         <a:solidFill>
           <a:srgbClr val="F7F9FC"/>
         </a:solidFill>
+        <a:effectLst/>
       </p:bgPr>
     </p:bg>
     <p:spTree>
@@ -9484,7 +9445,7 @@
           <a:bodyPr wrap="square" rtlCol="0" anchor="ctr"/>
           <a:lstStyle/>
           <a:p>
-            <a:pPr indent="0" marL="0">
+            <a:pPr marL="0" indent="0">
               <a:buNone/>
             </a:pPr>
             <a:r>
@@ -9521,7 +9482,7 @@
           </a:solidFill>
           <a:ln/>
           <a:effectLst>
-            <a:outerShdw sx="100000" sy="100000" kx="0" ky="0" algn="bl" rotWithShape="0" blurRad="101600" dist="25400" dir="8100000">
+            <a:outerShdw blurRad="101600" dist="25400" dir="8100000" algn="bl" rotWithShape="0">
               <a:srgbClr val="000000">
                 <a:alpha val="11000"/>
               </a:srgbClr>
@@ -9550,7 +9511,7 @@
           <a:bodyPr wrap="square" rtlCol="0" anchor="ctr"/>
           <a:lstStyle/>
           <a:p>
-            <a:pPr algn="ctr" indent="0" marL="0">
+            <a:pPr marL="0" indent="0" algn="ctr">
               <a:buNone/>
             </a:pPr>
             <a:r>
@@ -9589,7 +9550,7 @@
           <a:bodyPr wrap="square" rtlCol="0" anchor="ctr"/>
           <a:lstStyle/>
           <a:p>
-            <a:pPr algn="ctr" indent="0" marL="0">
+            <a:pPr marL="0" indent="0" algn="ctr">
               <a:buNone/>
             </a:pPr>
             <a:r>
@@ -9626,7 +9587,7 @@
           </a:solidFill>
           <a:ln/>
           <a:effectLst>
-            <a:outerShdw sx="100000" sy="100000" kx="0" ky="0" algn="bl" rotWithShape="0" blurRad="101600" dist="25400" dir="8100000">
+            <a:outerShdw blurRad="101600" dist="25400" dir="8100000" algn="bl" rotWithShape="0">
               <a:srgbClr val="000000">
                 <a:alpha val="11000"/>
               </a:srgbClr>
@@ -9655,7 +9616,7 @@
           <a:bodyPr wrap="square" rtlCol="0" anchor="ctr"/>
           <a:lstStyle/>
           <a:p>
-            <a:pPr algn="ctr" indent="0" marL="0">
+            <a:pPr marL="0" indent="0" algn="ctr">
               <a:buNone/>
             </a:pPr>
             <a:r>
@@ -9694,7 +9655,7 @@
           <a:bodyPr wrap="square" rtlCol="0" anchor="ctr"/>
           <a:lstStyle/>
           <a:p>
-            <a:pPr algn="ctr" indent="0" marL="0">
+            <a:pPr marL="0" indent="0" algn="ctr">
               <a:buNone/>
             </a:pPr>
             <a:r>
@@ -9731,7 +9692,7 @@
           </a:solidFill>
           <a:ln/>
           <a:effectLst>
-            <a:outerShdw sx="100000" sy="100000" kx="0" ky="0" algn="bl" rotWithShape="0" blurRad="101600" dist="25400" dir="8100000">
+            <a:outerShdw blurRad="101600" dist="25400" dir="8100000" algn="bl" rotWithShape="0">
               <a:srgbClr val="000000">
                 <a:alpha val="11000"/>
               </a:srgbClr>
@@ -9760,7 +9721,7 @@
           <a:bodyPr wrap="square" rtlCol="0" anchor="ctr"/>
           <a:lstStyle/>
           <a:p>
-            <a:pPr algn="ctr" indent="0" marL="0">
+            <a:pPr marL="0" indent="0" algn="ctr">
               <a:buNone/>
             </a:pPr>
             <a:r>
@@ -9799,7 +9760,7 @@
           <a:bodyPr wrap="square" rtlCol="0" anchor="ctr"/>
           <a:lstStyle/>
           <a:p>
-            <a:pPr algn="ctr" indent="0" marL="0">
+            <a:pPr marL="0" indent="0" algn="ctr">
               <a:buNone/>
             </a:pPr>
             <a:r>
@@ -9836,7 +9797,7 @@
           </a:solidFill>
           <a:ln/>
           <a:effectLst>
-            <a:outerShdw sx="100000" sy="100000" kx="0" ky="0" algn="bl" rotWithShape="0" blurRad="101600" dist="25400" dir="8100000">
+            <a:outerShdw blurRad="101600" dist="25400" dir="8100000" algn="bl" rotWithShape="0">
               <a:srgbClr val="000000">
                 <a:alpha val="11000"/>
               </a:srgbClr>
@@ -9865,7 +9826,7 @@
           <a:bodyPr wrap="square" rtlCol="0" anchor="ctr"/>
           <a:lstStyle/>
           <a:p>
-            <a:pPr algn="ctr" indent="0" marL="0">
+            <a:pPr marL="0" indent="0" algn="ctr">
               <a:buNone/>
             </a:pPr>
             <a:r>
@@ -9904,7 +9865,7 @@
           <a:bodyPr wrap="square" rtlCol="0" anchor="ctr"/>
           <a:lstStyle/>
           <a:p>
-            <a:pPr algn="ctr" indent="0" marL="0">
+            <a:pPr marL="0" indent="0" algn="ctr">
               <a:buNone/>
             </a:pPr>
             <a:r>
@@ -9946,7 +9907,7 @@
             <a:prstDash val="solid"/>
           </a:ln>
           <a:effectLst>
-            <a:outerShdw sx="100000" sy="100000" kx="0" ky="0" algn="bl" rotWithShape="0" blurRad="101600" dist="25400" dir="8100000">
+            <a:outerShdw blurRad="101600" dist="25400" dir="8100000" algn="bl" rotWithShape="0">
               <a:srgbClr val="000000">
                 <a:alpha val="11000"/>
               </a:srgbClr>
@@ -10015,7 +9976,7 @@
           <a:bodyPr wrap="square" rtlCol="0" anchor="ctr"/>
           <a:lstStyle/>
           <a:p>
-            <a:pPr indent="0" marL="0">
+            <a:pPr marL="0" indent="0">
               <a:buNone/>
             </a:pPr>
             <a:r>
@@ -10054,7 +10015,7 @@
           <a:bodyPr wrap="square" rtlCol="0" anchor="ctr"/>
           <a:lstStyle/>
           <a:p>
-            <a:pPr indent="0" marL="0">
+            <a:pPr marL="0" indent="0">
               <a:buNone/>
             </a:pPr>
             <a:r>
@@ -10093,7 +10054,7 @@
           <a:bodyPr wrap="square" rtlCol="0" anchor="ctr"/>
           <a:lstStyle/>
           <a:p>
-            <a:pPr indent="0" marL="0">
+            <a:pPr marL="0" indent="0">
               <a:buNone/>
             </a:pPr>
             <a:r>
@@ -10132,7 +10093,7 @@
           <a:bodyPr wrap="square" rtlCol="0" anchor="ctr"/>
           <a:lstStyle/>
           <a:p>
-            <a:pPr indent="0" marL="0">
+            <a:pPr marL="0" indent="0">
               <a:buNone/>
             </a:pPr>
             <a:r>
@@ -10171,7 +10132,7 @@
           <a:bodyPr wrap="square" rtlCol="0" anchor="ctr"/>
           <a:lstStyle/>
           <a:p>
-            <a:pPr indent="0" marL="0">
+            <a:pPr marL="0" indent="0">
               <a:buNone/>
             </a:pPr>
             <a:r>
@@ -10210,7 +10171,7 @@
           <a:bodyPr wrap="square" rtlCol="0" anchor="ctr"/>
           <a:lstStyle/>
           <a:p>
-            <a:pPr indent="0" marL="0">
+            <a:pPr marL="0" indent="0">
               <a:buNone/>
             </a:pPr>
             <a:r>
@@ -10244,6 +10205,7 @@
         <a:solidFill>
           <a:srgbClr val="1B2E4B"/>
         </a:solidFill>
+        <a:effectLst/>
       </p:bgPr>
     </p:bg>
     <p:spTree>
@@ -10631,7 +10593,7 @@
           <a:bodyPr wrap="square" lIns="0" tIns="0" rIns="0" bIns="0" rtlCol="0" anchor="ctr"/>
           <a:lstStyle/>
           <a:p>
-            <a:pPr algn="ctr" indent="0" marL="0">
+            <a:pPr marL="0" indent="0" algn="ctr">
               <a:buNone/>
             </a:pPr>
             <a:r>
@@ -10667,7 +10629,7 @@
           <a:bodyPr wrap="square" rtlCol="0" anchor="ctr"/>
           <a:lstStyle/>
           <a:p>
-            <a:pPr indent="0" marL="0">
+            <a:pPr marL="0" indent="0">
               <a:buNone/>
             </a:pPr>
             <a:r>
@@ -10706,7 +10668,7 @@
           <a:bodyPr wrap="square" rtlCol="0" anchor="ctr"/>
           <a:lstStyle/>
           <a:p>
-            <a:pPr indent="0" marL="0">
+            <a:pPr marL="0" indent="0">
               <a:buNone/>
             </a:pPr>
             <a:r>
@@ -10762,6 +10724,7 @@
         <a:solidFill>
           <a:srgbClr val="F7F9FC"/>
         </a:solidFill>
+        <a:effectLst/>
       </p:bgPr>
     </p:bg>
     <p:spTree>
@@ -10799,7 +10762,7 @@
           <a:bodyPr wrap="square" rtlCol="0" anchor="ctr"/>
           <a:lstStyle/>
           <a:p>
-            <a:pPr indent="0" marL="0">
+            <a:pPr marL="0" indent="0">
               <a:buNone/>
             </a:pPr>
             <a:r>
@@ -10841,7 +10804,7 @@
             <a:prstDash val="solid"/>
           </a:ln>
           <a:effectLst>
-            <a:outerShdw sx="100000" sy="100000" kx="0" ky="0" algn="bl" rotWithShape="0" blurRad="101600" dist="25400" dir="8100000">
+            <a:outerShdw blurRad="101600" dist="25400" dir="8100000" algn="bl" rotWithShape="0">
               <a:srgbClr val="000000">
                 <a:alpha val="11000"/>
               </a:srgbClr>
@@ -10890,7 +10853,7 @@
           <a:bodyPr wrap="square" rtlCol="0" anchor="ctr"/>
           <a:lstStyle/>
           <a:p>
-            <a:pPr indent="0" marL="0">
+            <a:pPr marL="0" indent="0">
               <a:buNone/>
             </a:pPr>
             <a:r>
@@ -10932,7 +10895,7 @@
             <a:prstDash val="solid"/>
           </a:ln>
           <a:effectLst>
-            <a:outerShdw sx="100000" sy="100000" kx="0" ky="0" algn="bl" rotWithShape="0" blurRad="101600" dist="25400" dir="8100000">
+            <a:outerShdw blurRad="101600" dist="25400" dir="8100000" algn="bl" rotWithShape="0">
               <a:srgbClr val="000000">
                 <a:alpha val="11000"/>
               </a:srgbClr>
@@ -10981,7 +10944,7 @@
           <a:bodyPr wrap="square" rtlCol="0" anchor="ctr"/>
           <a:lstStyle/>
           <a:p>
-            <a:pPr indent="0" marL="0">
+            <a:pPr marL="0" indent="0">
               <a:buNone/>
             </a:pPr>
             <a:r>
@@ -11020,7 +10983,7 @@
           <a:bodyPr wrap="square" rtlCol="0" anchor="ctr"/>
           <a:lstStyle/>
           <a:p>
-            <a:pPr indent="0" marL="0">
+            <a:pPr marL="0" indent="0">
               <a:buNone/>
             </a:pPr>
             <a:r>
@@ -11059,7 +11022,7 @@
           <a:bodyPr wrap="square" rtlCol="0" anchor="t"/>
           <a:lstStyle/>
           <a:p>
-            <a:pPr indent="0" marL="0">
+            <a:pPr marL="0" indent="0">
               <a:buNone/>
             </a:pPr>
             <a:r>
@@ -11101,7 +11064,7 @@
             <a:prstDash val="solid"/>
           </a:ln>
           <a:effectLst>
-            <a:outerShdw sx="100000" sy="100000" kx="0" ky="0" algn="bl" rotWithShape="0" blurRad="101600" dist="25400" dir="8100000">
+            <a:outerShdw blurRad="101600" dist="25400" dir="8100000" algn="bl" rotWithShape="0">
               <a:srgbClr val="000000">
                 <a:alpha val="11000"/>
               </a:srgbClr>
@@ -11150,7 +11113,7 @@
           <a:bodyPr wrap="square" rtlCol="0" anchor="ctr"/>
           <a:lstStyle/>
           <a:p>
-            <a:pPr indent="0" marL="0">
+            <a:pPr marL="0" indent="0">
               <a:buNone/>
             </a:pPr>
             <a:r>
@@ -11189,7 +11152,7 @@
           <a:bodyPr wrap="square" rtlCol="0" anchor="ctr"/>
           <a:lstStyle/>
           <a:p>
-            <a:pPr indent="0" marL="0">
+            <a:pPr marL="0" indent="0">
               <a:buNone/>
             </a:pPr>
             <a:r>
@@ -11228,7 +11191,7 @@
           <a:bodyPr wrap="square" rtlCol="0" anchor="t"/>
           <a:lstStyle/>
           <a:p>
-            <a:pPr indent="0" marL="0">
+            <a:pPr marL="0" indent="0">
               <a:buNone/>
             </a:pPr>
             <a:r>
@@ -11270,7 +11233,7 @@
             <a:prstDash val="solid"/>
           </a:ln>
           <a:effectLst>
-            <a:outerShdw sx="100000" sy="100000" kx="0" ky="0" algn="bl" rotWithShape="0" blurRad="101600" dist="25400" dir="8100000">
+            <a:outerShdw blurRad="101600" dist="25400" dir="8100000" algn="bl" rotWithShape="0">
               <a:srgbClr val="000000">
                 <a:alpha val="11000"/>
               </a:srgbClr>
@@ -11319,7 +11282,7 @@
           <a:bodyPr wrap="square" rtlCol="0" anchor="ctr"/>
           <a:lstStyle/>
           <a:p>
-            <a:pPr indent="0" marL="0">
+            <a:pPr marL="0" indent="0">
               <a:buNone/>
             </a:pPr>
             <a:r>
@@ -11358,7 +11321,7 @@
           <a:bodyPr wrap="square" rtlCol="0" anchor="ctr"/>
           <a:lstStyle/>
           <a:p>
-            <a:pPr indent="0" marL="0">
+            <a:pPr marL="0" indent="0">
               <a:buNone/>
             </a:pPr>
             <a:r>
@@ -11397,7 +11360,7 @@
           <a:bodyPr wrap="square" rtlCol="0" anchor="t"/>
           <a:lstStyle/>
           <a:p>
-            <a:pPr indent="0" marL="0">
+            <a:pPr marL="0" indent="0">
               <a:buNone/>
             </a:pPr>
             <a:r>
@@ -11439,7 +11402,7 @@
             <a:prstDash val="solid"/>
           </a:ln>
           <a:effectLst>
-            <a:outerShdw sx="100000" sy="100000" kx="0" ky="0" algn="bl" rotWithShape="0" blurRad="101600" dist="25400" dir="8100000">
+            <a:outerShdw blurRad="101600" dist="25400" dir="8100000" algn="bl" rotWithShape="0">
               <a:srgbClr val="000000">
                 <a:alpha val="11000"/>
               </a:srgbClr>
@@ -11488,7 +11451,7 @@
           <a:bodyPr wrap="square" rtlCol="0" anchor="ctr"/>
           <a:lstStyle/>
           <a:p>
-            <a:pPr indent="0" marL="0">
+            <a:pPr marL="0" indent="0">
               <a:buNone/>
             </a:pPr>
             <a:r>
@@ -11527,7 +11490,7 @@
           <a:bodyPr wrap="square" rtlCol="0" anchor="ctr"/>
           <a:lstStyle/>
           <a:p>
-            <a:pPr indent="0" marL="0">
+            <a:pPr marL="0" indent="0">
               <a:buNone/>
             </a:pPr>
             <a:r>
@@ -11566,7 +11529,7 @@
           <a:bodyPr wrap="square" rtlCol="0" anchor="t"/>
           <a:lstStyle/>
           <a:p>
-            <a:pPr indent="0" marL="0">
+            <a:pPr marL="0" indent="0">
               <a:buNone/>
             </a:pPr>
             <a:r>
@@ -11608,7 +11571,7 @@
             <a:prstDash val="solid"/>
           </a:ln>
           <a:effectLst>
-            <a:outerShdw sx="100000" sy="100000" kx="0" ky="0" algn="bl" rotWithShape="0" blurRad="101600" dist="25400" dir="8100000">
+            <a:outerShdw blurRad="101600" dist="25400" dir="8100000" algn="bl" rotWithShape="0">
               <a:srgbClr val="000000">
                 <a:alpha val="11000"/>
               </a:srgbClr>
@@ -11657,7 +11620,7 @@
           <a:bodyPr wrap="square" rtlCol="0" anchor="ctr"/>
           <a:lstStyle/>
           <a:p>
-            <a:pPr indent="0" marL="0">
+            <a:pPr marL="0" indent="0">
               <a:buNone/>
             </a:pPr>
             <a:r>
@@ -11696,7 +11659,7 @@
           <a:bodyPr wrap="square" rtlCol="0" anchor="ctr"/>
           <a:lstStyle/>
           <a:p>
-            <a:pPr indent="0" marL="0">
+            <a:pPr marL="0" indent="0">
               <a:buNone/>
             </a:pPr>
             <a:r>
@@ -11735,7 +11698,7 @@
           <a:bodyPr wrap="square" rtlCol="0" anchor="t"/>
           <a:lstStyle/>
           <a:p>
-            <a:pPr indent="0" marL="0">
+            <a:pPr marL="0" indent="0">
               <a:buNone/>
             </a:pPr>
             <a:r>
@@ -11774,7 +11737,7 @@
           <a:bodyPr wrap="square" rtlCol="0" anchor="ctr"/>
           <a:lstStyle/>
           <a:p>
-            <a:pPr algn="ctr" indent="0" marL="0">
+            <a:pPr marL="0" indent="0" algn="ctr">
               <a:buNone/>
             </a:pPr>
             <a:r>
@@ -11808,6 +11771,7 @@
         <a:solidFill>
           <a:srgbClr val="F7F9FC"/>
         </a:solidFill>
+        <a:effectLst/>
       </p:bgPr>
     </p:bg>
     <p:spTree>
@@ -11845,7 +11809,7 @@
           <a:bodyPr wrap="square" rtlCol="0" anchor="ctr"/>
           <a:lstStyle/>
           <a:p>
-            <a:pPr indent="0" marL="0">
+            <a:pPr marL="0" indent="0">
               <a:buNone/>
             </a:pPr>
             <a:r>
@@ -11887,7 +11851,7 @@
             <a:prstDash val="solid"/>
           </a:ln>
           <a:effectLst>
-            <a:outerShdw sx="100000" sy="100000" kx="0" ky="0" algn="bl" rotWithShape="0" blurRad="101600" dist="25400" dir="8100000">
+            <a:outerShdw blurRad="101600" dist="25400" dir="8100000" algn="bl" rotWithShape="0">
               <a:srgbClr val="000000">
                 <a:alpha val="11000"/>
               </a:srgbClr>
@@ -11936,7 +11900,7 @@
           <a:bodyPr wrap="square" rtlCol="0" anchor="ctr"/>
           <a:lstStyle/>
           <a:p>
-            <a:pPr indent="0" marL="0">
+            <a:pPr marL="0" indent="0">
               <a:buNone/>
             </a:pPr>
             <a:r>
@@ -11975,7 +11939,7 @@
           <a:bodyPr wrap="square" rtlCol="0" anchor="ctr"/>
           <a:lstStyle/>
           <a:p>
-            <a:pPr indent="0" marL="0">
+            <a:pPr marL="0" indent="0">
               <a:buNone/>
             </a:pPr>
             <a:r>
@@ -12014,7 +11978,7 @@
           <a:bodyPr wrap="square" rtlCol="0" anchor="ctr"/>
           <a:lstStyle/>
           <a:p>
-            <a:pPr indent="0" marL="0">
+            <a:pPr marL="0" indent="0">
               <a:buNone/>
             </a:pPr>
             <a:r>
@@ -12053,7 +12017,7 @@
           <a:bodyPr wrap="square" rtlCol="0" anchor="ctr"/>
           <a:lstStyle/>
           <a:p>
-            <a:pPr indent="0" marL="0">
+            <a:pPr marL="0" indent="0">
               <a:buNone/>
             </a:pPr>
             <a:r>
@@ -12092,7 +12056,7 @@
           <a:bodyPr wrap="square" rtlCol="0" anchor="ctr"/>
           <a:lstStyle/>
           <a:p>
-            <a:pPr indent="0" marL="0">
+            <a:pPr marL="0" indent="0">
               <a:buNone/>
             </a:pPr>
             <a:r>
@@ -12131,7 +12095,7 @@
           <a:bodyPr wrap="square" rtlCol="0" anchor="ctr"/>
           <a:lstStyle/>
           <a:p>
-            <a:pPr indent="0" marL="0">
+            <a:pPr marL="0" indent="0">
               <a:buNone/>
             </a:pPr>
             <a:r>
@@ -12170,7 +12134,7 @@
           <a:bodyPr wrap="square" rtlCol="0" anchor="ctr"/>
           <a:lstStyle/>
           <a:p>
-            <a:pPr indent="0" marL="0">
+            <a:pPr marL="0" indent="0">
               <a:buNone/>
             </a:pPr>
             <a:r>
@@ -12209,7 +12173,7 @@
           <a:bodyPr wrap="square" rtlCol="0" anchor="ctr"/>
           <a:lstStyle/>
           <a:p>
-            <a:pPr indent="0" marL="0">
+            <a:pPr marL="0" indent="0">
               <a:buNone/>
             </a:pPr>
             <a:r>
@@ -12248,7 +12212,7 @@
           <a:bodyPr wrap="square" rtlCol="0" anchor="ctr"/>
           <a:lstStyle/>
           <a:p>
-            <a:pPr indent="0" marL="0">
+            <a:pPr marL="0" indent="0">
               <a:buNone/>
             </a:pPr>
             <a:r>
@@ -12285,7 +12249,7 @@
           </a:solidFill>
           <a:ln/>
           <a:effectLst>
-            <a:outerShdw sx="100000" sy="100000" kx="0" ky="0" algn="bl" rotWithShape="0" blurRad="101600" dist="25400" dir="8100000">
+            <a:outerShdw blurRad="101600" dist="25400" dir="8100000" algn="bl" rotWithShape="0">
               <a:srgbClr val="000000">
                 <a:alpha val="11000"/>
               </a:srgbClr>
@@ -12314,7 +12278,7 @@
           <a:bodyPr wrap="square" rtlCol="0" anchor="ctr"/>
           <a:lstStyle/>
           <a:p>
-            <a:pPr indent="0" marL="0">
+            <a:pPr marL="0" indent="0">
               <a:buNone/>
             </a:pPr>
             <a:r>
@@ -12353,7 +12317,7 @@
           <a:bodyPr wrap="square" rtlCol="0" anchor="ctr"/>
           <a:lstStyle/>
           <a:p>
-            <a:pPr indent="0" marL="0">
+            <a:pPr marL="0" indent="0">
               <a:buNone/>
             </a:pPr>
             <a:r>
@@ -12392,7 +12356,7 @@
           <a:bodyPr wrap="square" rtlCol="0" anchor="ctr"/>
           <a:lstStyle/>
           <a:p>
-            <a:pPr indent="0" marL="0">
+            <a:pPr marL="0" indent="0">
               <a:buNone/>
             </a:pPr>
             <a:r>
@@ -12431,7 +12395,7 @@
           <a:bodyPr wrap="square" rtlCol="0" anchor="ctr"/>
           <a:lstStyle/>
           <a:p>
-            <a:pPr indent="0" marL="0">
+            <a:pPr marL="0" indent="0">
               <a:buNone/>
             </a:pPr>
             <a:r>
@@ -12470,7 +12434,7 @@
           <a:bodyPr wrap="square" rtlCol="0" anchor="ctr"/>
           <a:lstStyle/>
           <a:p>
-            <a:pPr indent="0" marL="0">
+            <a:pPr marL="0" indent="0">
               <a:buNone/>
             </a:pPr>
             <a:r>
@@ -12509,7 +12473,7 @@
           <a:bodyPr wrap="square" rtlCol="0" anchor="ctr"/>
           <a:lstStyle/>
           <a:p>
-            <a:pPr indent="0" marL="0">
+            <a:pPr marL="0" indent="0">
               <a:buNone/>
             </a:pPr>
             <a:r>
@@ -12548,7 +12512,7 @@
           <a:bodyPr wrap="square" rtlCol="0" anchor="ctr"/>
           <a:lstStyle/>
           <a:p>
-            <a:pPr indent="0" marL="0">
+            <a:pPr marL="0" indent="0">
               <a:buNone/>
             </a:pPr>
             <a:r>
@@ -12587,7 +12551,7 @@
           <a:bodyPr wrap="square" rtlCol="0" anchor="ctr"/>
           <a:lstStyle/>
           <a:p>
-            <a:pPr indent="0" marL="0">
+            <a:pPr marL="0" indent="0">
               <a:buNone/>
             </a:pPr>
             <a:r>
@@ -12626,7 +12590,7 @@
           <a:bodyPr wrap="square" rtlCol="0" anchor="ctr"/>
           <a:lstStyle/>
           <a:p>
-            <a:pPr indent="0" marL="0">
+            <a:pPr marL="0" indent="0">
               <a:buNone/>
             </a:pPr>
             <a:r>
@@ -12665,7 +12629,7 @@
           <a:bodyPr wrap="square" rtlCol="0" anchor="ctr"/>
           <a:lstStyle/>
           <a:p>
-            <a:pPr indent="0" marL="0">
+            <a:pPr marL="0" indent="0">
               <a:buNone/>
             </a:pPr>
             <a:r>
@@ -12704,7 +12668,7 @@
           <a:bodyPr wrap="square" rtlCol="0" anchor="ctr"/>
           <a:lstStyle/>
           <a:p>
-            <a:pPr indent="0" marL="0">
+            <a:pPr marL="0" indent="0">
               <a:buNone/>
             </a:pPr>
             <a:r>
@@ -12738,6 +12702,7 @@
         <a:solidFill>
           <a:srgbClr val="F7F9FC"/>
         </a:solidFill>
+        <a:effectLst/>
       </p:bgPr>
     </p:bg>
     <p:spTree>
@@ -12775,7 +12740,7 @@
           <a:bodyPr wrap="square" rtlCol="0" anchor="ctr"/>
           <a:lstStyle/>
           <a:p>
-            <a:pPr indent="0" marL="0">
+            <a:pPr marL="0" indent="0">
               <a:buNone/>
             </a:pPr>
             <a:r>
@@ -12812,7 +12777,7 @@
           </a:solidFill>
           <a:ln/>
           <a:effectLst>
-            <a:outerShdw sx="100000" sy="100000" kx="0" ky="0" algn="bl" rotWithShape="0" blurRad="101600" dist="25400" dir="8100000">
+            <a:outerShdw blurRad="101600" dist="25400" dir="8100000" algn="bl" rotWithShape="0">
               <a:srgbClr val="000000">
                 <a:alpha val="11000"/>
               </a:srgbClr>
@@ -12841,7 +12806,7 @@
           <a:bodyPr wrap="square" rtlCol="0" anchor="ctr"/>
           <a:lstStyle/>
           <a:p>
-            <a:pPr indent="0" marL="0">
+            <a:pPr marL="0" indent="0">
               <a:buNone/>
             </a:pPr>
             <a:r>
@@ -12880,7 +12845,7 @@
           <a:bodyPr wrap="square" rtlCol="0" anchor="ctr"/>
           <a:lstStyle/>
           <a:p>
-            <a:pPr indent="0" marL="0">
+            <a:pPr marL="0" indent="0">
               <a:buNone/>
             </a:pPr>
             <a:r>
@@ -12919,7 +12884,7 @@
           <a:bodyPr wrap="square" rtlCol="0" anchor="ctr"/>
           <a:lstStyle/>
           <a:p>
-            <a:pPr indent="0" marL="0">
+            <a:pPr marL="0" indent="0">
               <a:buNone/>
             </a:pPr>
             <a:r>
@@ -12958,7 +12923,7 @@
           <a:bodyPr wrap="square" rtlCol="0" anchor="ctr"/>
           <a:lstStyle/>
           <a:p>
-            <a:pPr indent="0" marL="0">
+            <a:pPr marL="0" indent="0">
               <a:buNone/>
             </a:pPr>
             <a:r>
@@ -12997,7 +12962,7 @@
           <a:bodyPr wrap="square" rtlCol="0" anchor="ctr"/>
           <a:lstStyle/>
           <a:p>
-            <a:pPr indent="0" marL="0">
+            <a:pPr marL="0" indent="0">
               <a:buNone/>
             </a:pPr>
             <a:r>
@@ -13036,7 +13001,7 @@
           <a:bodyPr wrap="square" rtlCol="0" anchor="ctr"/>
           <a:lstStyle/>
           <a:p>
-            <a:pPr indent="0" marL="0">
+            <a:pPr marL="0" indent="0">
               <a:buNone/>
             </a:pPr>
             <a:r>
@@ -13075,7 +13040,7 @@
           <a:bodyPr wrap="square" rtlCol="0" anchor="ctr"/>
           <a:lstStyle/>
           <a:p>
-            <a:pPr indent="0" marL="0">
+            <a:pPr marL="0" indent="0">
               <a:buNone/>
             </a:pPr>
             <a:r>
@@ -13114,7 +13079,7 @@
           <a:bodyPr wrap="square" rtlCol="0" anchor="ctr"/>
           <a:lstStyle/>
           <a:p>
-            <a:pPr indent="0" marL="0">
+            <a:pPr marL="0" indent="0">
               <a:buNone/>
             </a:pPr>
             <a:r>
@@ -13153,7 +13118,7 @@
           <a:bodyPr wrap="square" rtlCol="0" anchor="ctr"/>
           <a:lstStyle/>
           <a:p>
-            <a:pPr indent="0" marL="0">
+            <a:pPr marL="0" indent="0">
               <a:buNone/>
             </a:pPr>
             <a:r>
@@ -13195,7 +13160,7 @@
             <a:prstDash val="solid"/>
           </a:ln>
           <a:effectLst>
-            <a:outerShdw sx="100000" sy="100000" kx="0" ky="0" algn="bl" rotWithShape="0" blurRad="101600" dist="25400" dir="8100000">
+            <a:outerShdw blurRad="101600" dist="25400" dir="8100000" algn="bl" rotWithShape="0">
               <a:srgbClr val="000000">
                 <a:alpha val="11000"/>
               </a:srgbClr>
@@ -13244,7 +13209,7 @@
           <a:bodyPr wrap="square" rtlCol="0" anchor="ctr"/>
           <a:lstStyle/>
           <a:p>
-            <a:pPr algn="ctr" indent="0" marL="0">
+            <a:pPr marL="0" indent="0" algn="ctr">
               <a:buNone/>
             </a:pPr>
             <a:r>
@@ -13261,7 +13226,7 @@
             <a:endParaRPr lang="en-US" sz="1800" dirty="0"/>
           </a:p>
           <a:p>
-            <a:pPr algn="ctr" indent="0" marL="0">
+            <a:pPr marL="0" indent="0" algn="ctr">
               <a:buNone/>
             </a:pPr>
             <a:r>
@@ -13300,7 +13265,7 @@
           <a:bodyPr wrap="square" rtlCol="0" anchor="ctr"/>
           <a:lstStyle/>
           <a:p>
-            <a:pPr algn="ctr" indent="0" marL="0">
+            <a:pPr marL="0" indent="0" algn="ctr">
               <a:buNone/>
             </a:pPr>
             <a:r>
@@ -13342,7 +13307,7 @@
             <a:prstDash val="solid"/>
           </a:ln>
           <a:effectLst>
-            <a:outerShdw sx="100000" sy="100000" kx="0" ky="0" algn="bl" rotWithShape="0" blurRad="101600" dist="25400" dir="8100000">
+            <a:outerShdw blurRad="101600" dist="25400" dir="8100000" algn="bl" rotWithShape="0">
               <a:srgbClr val="000000">
                 <a:alpha val="11000"/>
               </a:srgbClr>
@@ -13391,7 +13356,7 @@
           <a:bodyPr wrap="square" rtlCol="0" anchor="ctr"/>
           <a:lstStyle/>
           <a:p>
-            <a:pPr indent="0" marL="0">
+            <a:pPr marL="0" indent="0">
               <a:buNone/>
             </a:pPr>
             <a:r>
@@ -13430,7 +13395,7 @@
           <a:bodyPr wrap="square" rtlCol="0" anchor="ctr"/>
           <a:lstStyle/>
           <a:p>
-            <a:pPr indent="0" marL="0">
+            <a:pPr marL="0" indent="0">
               <a:buNone/>
             </a:pPr>
             <a:r>
@@ -13469,7 +13434,7 @@
           <a:bodyPr wrap="square" rtlCol="0" anchor="ctr"/>
           <a:lstStyle/>
           <a:p>
-            <a:pPr indent="0" marL="0">
+            <a:pPr marL="0" indent="0">
               <a:buNone/>
             </a:pPr>
             <a:r>
@@ -13508,7 +13473,7 @@
           <a:bodyPr wrap="square" rtlCol="0" anchor="ctr"/>
           <a:lstStyle/>
           <a:p>
-            <a:pPr indent="0" marL="0">
+            <a:pPr marL="0" indent="0">
               <a:buNone/>
             </a:pPr>
             <a:r>
@@ -13547,7 +13512,7 @@
           <a:bodyPr wrap="square" rtlCol="0" anchor="ctr"/>
           <a:lstStyle/>
           <a:p>
-            <a:pPr indent="0" marL="0">
+            <a:pPr marL="0" indent="0">
               <a:buNone/>
             </a:pPr>
             <a:r>
@@ -13565,6 +13530,36 @@
           </a:p>
         </p:txBody>
       </p:sp>
+      <p:pic>
+        <p:nvPicPr>
+          <p:cNvPr id="24" name="Picture 23">
+            <a:extLst>
+              <a:ext uri="{FF2B5EF4-FFF2-40B4-BE49-F238E27FC236}">
+                <a16:creationId xmlns:a16="http://schemas.microsoft.com/office/drawing/2014/main" id="{1751FD9A-E57A-DE50-691A-DB8B4AF13022}"/>
+              </a:ext>
+            </a:extLst>
+          </p:cNvPr>
+          <p:cNvPicPr>
+            <a:picLocks noChangeAspect="1"/>
+          </p:cNvPicPr>
+          <p:nvPr/>
+        </p:nvPicPr>
+        <p:blipFill>
+          <a:blip r:embed="rId3"/>
+          <a:stretch>
+            <a:fillRect/>
+          </a:stretch>
+        </p:blipFill>
+        <p:spPr>
+          <a:xfrm>
+            <a:off x="7258796" y="3120306"/>
+            <a:ext cx="1246632" cy="1384949"/>
+          </a:xfrm>
+          <a:prstGeom prst="rect">
+            <a:avLst/>
+          </a:prstGeom>
+        </p:spPr>
+      </p:pic>
     </p:spTree>
   </p:cSld>
   <p:clrMapOvr>
@@ -13581,6 +13576,7 @@
         <a:solidFill>
           <a:srgbClr val="1B2E4B"/>
         </a:solidFill>
+        <a:effectLst/>
       </p:bgPr>
     </p:bg>
     <p:spTree>
@@ -13968,7 +13964,7 @@
           <a:bodyPr wrap="square" lIns="0" tIns="0" rIns="0" bIns="0" rtlCol="0" anchor="ctr"/>
           <a:lstStyle/>
           <a:p>
-            <a:pPr algn="ctr" indent="0" marL="0">
+            <a:pPr marL="0" indent="0" algn="ctr">
               <a:buNone/>
             </a:pPr>
             <a:r>
@@ -14004,7 +14000,7 @@
           <a:bodyPr wrap="square" rtlCol="0" anchor="ctr"/>
           <a:lstStyle/>
           <a:p>
-            <a:pPr indent="0" marL="0">
+            <a:pPr marL="0" indent="0">
               <a:buNone/>
             </a:pPr>
             <a:r>
@@ -14043,7 +14039,7 @@
           <a:bodyPr wrap="square" rtlCol="0" anchor="ctr"/>
           <a:lstStyle/>
           <a:p>
-            <a:pPr indent="0" marL="0">
+            <a:pPr marL="0" indent="0">
               <a:buNone/>
             </a:pPr>
             <a:r>
@@ -14099,6 +14095,7 @@
         <a:solidFill>
           <a:srgbClr val="F7F9FC"/>
         </a:solidFill>
+        <a:effectLst/>
       </p:bgPr>
     </p:bg>
     <p:spTree>
@@ -14136,7 +14133,7 @@
           <a:bodyPr wrap="square" rtlCol="0" anchor="ctr"/>
           <a:lstStyle/>
           <a:p>
-            <a:pPr indent="0" marL="0">
+            <a:pPr marL="0" indent="0">
               <a:buNone/>
             </a:pPr>
             <a:r>
@@ -14178,7 +14175,7 @@
             <a:prstDash val="solid"/>
           </a:ln>
           <a:effectLst>
-            <a:outerShdw sx="100000" sy="100000" kx="0" ky="0" algn="bl" rotWithShape="0" blurRad="101600" dist="25400" dir="8100000">
+            <a:outerShdw blurRad="101600" dist="25400" dir="8100000" algn="bl" rotWithShape="0">
               <a:srgbClr val="000000">
                 <a:alpha val="11000"/>
               </a:srgbClr>
@@ -14227,7 +14224,7 @@
           <a:bodyPr wrap="square" rtlCol="0" anchor="ctr"/>
           <a:lstStyle/>
           <a:p>
-            <a:pPr indent="0" marL="0">
+            <a:pPr marL="0" indent="0">
               <a:buNone/>
             </a:pPr>
             <a:r>
@@ -14266,7 +14263,7 @@
           <a:bodyPr wrap="square" rtlCol="0" anchor="t"/>
           <a:lstStyle/>
           <a:p>
-            <a:pPr indent="0" marL="0">
+            <a:pPr marL="0" indent="0">
               <a:buNone/>
             </a:pPr>
             <a:r>
@@ -14305,7 +14302,7 @@
           <a:bodyPr wrap="square" rtlCol="0" anchor="t"/>
           <a:lstStyle/>
           <a:p>
-            <a:pPr indent="0" marL="0">
+            <a:pPr marL="0" indent="0">
               <a:buNone/>
             </a:pPr>
             <a:r>
@@ -14344,7 +14341,7 @@
           <a:bodyPr wrap="square" rtlCol="0" anchor="t"/>
           <a:lstStyle/>
           <a:p>
-            <a:pPr indent="0" marL="0">
+            <a:pPr marL="0" indent="0">
               <a:buNone/>
             </a:pPr>
             <a:r>
@@ -14383,7 +14380,7 @@
           <a:bodyPr wrap="square" rtlCol="0" anchor="t"/>
           <a:lstStyle/>
           <a:p>
-            <a:pPr indent="0" marL="0">
+            <a:pPr marL="0" indent="0">
               <a:buNone/>
             </a:pPr>
             <a:r>
@@ -14422,7 +14419,7 @@
           <a:bodyPr wrap="square" rtlCol="0" anchor="t"/>
           <a:lstStyle/>
           <a:p>
-            <a:pPr indent="0" marL="0">
+            <a:pPr marL="0" indent="0">
               <a:buNone/>
             </a:pPr>
             <a:r>
@@ -14459,7 +14456,7 @@
           </a:solidFill>
           <a:ln/>
           <a:effectLst>
-            <a:outerShdw sx="100000" sy="100000" kx="0" ky="0" algn="bl" rotWithShape="0" blurRad="101600" dist="25400" dir="8100000">
+            <a:outerShdw blurRad="101600" dist="25400" dir="8100000" algn="bl" rotWithShape="0">
               <a:srgbClr val="000000">
                 <a:alpha val="11000"/>
               </a:srgbClr>
@@ -14488,7 +14485,7 @@
           <a:bodyPr wrap="square" rtlCol="0" anchor="ctr"/>
           <a:lstStyle/>
           <a:p>
-            <a:pPr indent="0" marL="0">
+            <a:pPr marL="0" indent="0">
               <a:buNone/>
             </a:pPr>
             <a:r>
@@ -14527,7 +14524,7 @@
           <a:bodyPr wrap="square" rtlCol="0" anchor="t"/>
           <a:lstStyle/>
           <a:p>
-            <a:pPr indent="0" marL="0">
+            <a:pPr marL="0" indent="0">
               <a:buNone/>
             </a:pPr>
             <a:r>
@@ -14566,7 +14563,7 @@
           <a:bodyPr wrap="square" rtlCol="0" anchor="t"/>
           <a:lstStyle/>
           <a:p>
-            <a:pPr indent="0" marL="0">
+            <a:pPr marL="0" indent="0">
               <a:buNone/>
             </a:pPr>
             <a:r>
@@ -14605,7 +14602,7 @@
           <a:bodyPr wrap="square" rtlCol="0" anchor="t"/>
           <a:lstStyle/>
           <a:p>
-            <a:pPr indent="0" marL="0">
+            <a:pPr marL="0" indent="0">
               <a:buNone/>
             </a:pPr>
             <a:r>
@@ -14644,7 +14641,7 @@
           <a:bodyPr wrap="square" rtlCol="0" anchor="t"/>
           <a:lstStyle/>
           <a:p>
-            <a:pPr indent="0" marL="0">
+            <a:pPr marL="0" indent="0">
               <a:buNone/>
             </a:pPr>
             <a:r>
@@ -14683,7 +14680,7 @@
           <a:bodyPr wrap="square" rtlCol="0" anchor="t"/>
           <a:lstStyle/>
           <a:p>
-            <a:pPr indent="0" marL="0">
+            <a:pPr marL="0" indent="0">
               <a:buNone/>
             </a:pPr>
             <a:r>
@@ -14717,6 +14714,7 @@
         <a:solidFill>
           <a:srgbClr val="F7F9FC"/>
         </a:solidFill>
+        <a:effectLst/>
       </p:bgPr>
     </p:bg>
     <p:spTree>
@@ -14754,7 +14752,7 @@
           <a:bodyPr wrap="square" rtlCol="0" anchor="ctr"/>
           <a:lstStyle/>
           <a:p>
-            <a:pPr indent="0" marL="0">
+            <a:pPr marL="0" indent="0">
               <a:buNone/>
             </a:pPr>
             <a:r>
@@ -14796,7 +14794,7 @@
             <a:prstDash val="solid"/>
           </a:ln>
           <a:effectLst>
-            <a:outerShdw sx="100000" sy="100000" kx="0" ky="0" algn="bl" rotWithShape="0" blurRad="101600" dist="25400" dir="8100000">
+            <a:outerShdw blurRad="101600" dist="25400" dir="8100000" algn="bl" rotWithShape="0">
               <a:srgbClr val="000000">
                 <a:alpha val="11000"/>
               </a:srgbClr>
@@ -14845,7 +14843,7 @@
           <a:bodyPr wrap="square" rtlCol="0" anchor="ctr"/>
           <a:lstStyle/>
           <a:p>
-            <a:pPr indent="0" marL="0">
+            <a:pPr marL="0" indent="0">
               <a:buNone/>
             </a:pPr>
             <a:r>
@@ -14884,7 +14882,7 @@
           <a:bodyPr wrap="square" rtlCol="0" anchor="t"/>
           <a:lstStyle/>
           <a:p>
-            <a:pPr indent="0" marL="0">
+            <a:pPr marL="0" indent="0">
               <a:buNone/>
             </a:pPr>
             <a:r>
@@ -14898,9 +14896,6 @@
               </a:rPr>
               <a:t>→  </a:t>
             </a:r>
-            <a:pPr indent="0" marL="0">
-              <a:buNone/>
-            </a:pPr>
             <a:r>
               <a:rPr lang="en-US" sz="1200" dirty="0">
                 <a:solidFill>
@@ -14937,7 +14932,7 @@
           <a:bodyPr wrap="square" rtlCol="0" anchor="t"/>
           <a:lstStyle/>
           <a:p>
-            <a:pPr indent="0" marL="0">
+            <a:pPr marL="0" indent="0">
               <a:buNone/>
             </a:pPr>
             <a:r>
@@ -14951,9 +14946,6 @@
               </a:rPr>
               <a:t>→  </a:t>
             </a:r>
-            <a:pPr indent="0" marL="0">
-              <a:buNone/>
-            </a:pPr>
             <a:r>
               <a:rPr lang="en-US" sz="1200" dirty="0">
                 <a:solidFill>
@@ -14990,7 +14982,7 @@
           <a:bodyPr wrap="square" rtlCol="0" anchor="t"/>
           <a:lstStyle/>
           <a:p>
-            <a:pPr indent="0" marL="0">
+            <a:pPr marL="0" indent="0">
               <a:buNone/>
             </a:pPr>
             <a:r>
@@ -15004,9 +14996,6 @@
               </a:rPr>
               <a:t>→  </a:t>
             </a:r>
-            <a:pPr indent="0" marL="0">
-              <a:buNone/>
-            </a:pPr>
             <a:r>
               <a:rPr lang="en-US" sz="1200" dirty="0">
                 <a:solidFill>
@@ -15043,7 +15032,7 @@
           <a:bodyPr wrap="square" rtlCol="0" anchor="t"/>
           <a:lstStyle/>
           <a:p>
-            <a:pPr indent="0" marL="0">
+            <a:pPr marL="0" indent="0">
               <a:buNone/>
             </a:pPr>
             <a:r>
@@ -15057,9 +15046,6 @@
               </a:rPr>
               <a:t>→  </a:t>
             </a:r>
-            <a:pPr indent="0" marL="0">
-              <a:buNone/>
-            </a:pPr>
             <a:r>
               <a:rPr lang="en-US" sz="1200" dirty="0">
                 <a:solidFill>
@@ -15099,7 +15085,7 @@
             <a:prstDash val="solid"/>
           </a:ln>
           <a:effectLst>
-            <a:outerShdw sx="100000" sy="100000" kx="0" ky="0" algn="bl" rotWithShape="0" blurRad="101600" dist="25400" dir="8100000">
+            <a:outerShdw blurRad="101600" dist="25400" dir="8100000" algn="bl" rotWithShape="0">
               <a:srgbClr val="000000">
                 <a:alpha val="11000"/>
               </a:srgbClr>
@@ -15148,7 +15134,7 @@
           <a:bodyPr wrap="square" rtlCol="0" anchor="ctr"/>
           <a:lstStyle/>
           <a:p>
-            <a:pPr indent="0" marL="0">
+            <a:pPr marL="0" indent="0">
               <a:buNone/>
             </a:pPr>
             <a:r>
@@ -15187,7 +15173,7 @@
           <a:bodyPr wrap="square" rtlCol="0" anchor="t"/>
           <a:lstStyle/>
           <a:p>
-            <a:pPr indent="0" marL="0">
+            <a:pPr marL="0" indent="0">
               <a:buNone/>
             </a:pPr>
             <a:r>
@@ -15201,9 +15187,6 @@
               </a:rPr>
               <a:t>→  </a:t>
             </a:r>
-            <a:pPr indent="0" marL="0">
-              <a:buNone/>
-            </a:pPr>
             <a:r>
               <a:rPr lang="en-US" sz="1200" dirty="0">
                 <a:solidFill>
@@ -15240,7 +15223,7 @@
           <a:bodyPr wrap="square" rtlCol="0" anchor="t"/>
           <a:lstStyle/>
           <a:p>
-            <a:pPr indent="0" marL="0">
+            <a:pPr marL="0" indent="0">
               <a:buNone/>
             </a:pPr>
             <a:r>
@@ -15254,9 +15237,6 @@
               </a:rPr>
               <a:t>→  </a:t>
             </a:r>
-            <a:pPr indent="0" marL="0">
-              <a:buNone/>
-            </a:pPr>
             <a:r>
               <a:rPr lang="en-US" sz="1200" dirty="0">
                 <a:solidFill>
@@ -15293,7 +15273,7 @@
           <a:bodyPr wrap="square" rtlCol="0" anchor="t"/>
           <a:lstStyle/>
           <a:p>
-            <a:pPr indent="0" marL="0">
+            <a:pPr marL="0" indent="0">
               <a:buNone/>
             </a:pPr>
             <a:r>
@@ -15307,9 +15287,6 @@
               </a:rPr>
               <a:t>→  </a:t>
             </a:r>
-            <a:pPr indent="0" marL="0">
-              <a:buNone/>
-            </a:pPr>
             <a:r>
               <a:rPr lang="en-US" sz="1200" dirty="0">
                 <a:solidFill>
@@ -15346,7 +15323,7 @@
           <a:bodyPr wrap="square" rtlCol="0" anchor="t"/>
           <a:lstStyle/>
           <a:p>
-            <a:pPr indent="0" marL="0">
+            <a:pPr marL="0" indent="0">
               <a:buNone/>
             </a:pPr>
             <a:r>
@@ -15360,9 +15337,6 @@
               </a:rPr>
               <a:t>→  </a:t>
             </a:r>
-            <a:pPr indent="0" marL="0">
-              <a:buNone/>
-            </a:pPr>
             <a:r>
               <a:rPr lang="en-US" sz="1200" dirty="0">
                 <a:solidFill>
@@ -15402,7 +15376,7 @@
             <a:prstDash val="solid"/>
           </a:ln>
           <a:effectLst>
-            <a:outerShdw sx="100000" sy="100000" kx="0" ky="0" algn="bl" rotWithShape="0" blurRad="101600" dist="25400" dir="8100000">
+            <a:outerShdw blurRad="101600" dist="25400" dir="8100000" algn="bl" rotWithShape="0">
               <a:srgbClr val="000000">
                 <a:alpha val="11000"/>
               </a:srgbClr>
@@ -15451,7 +15425,7 @@
           <a:bodyPr wrap="square" rtlCol="0" anchor="ctr"/>
           <a:lstStyle/>
           <a:p>
-            <a:pPr indent="0" marL="0">
+            <a:pPr marL="0" indent="0">
               <a:buNone/>
             </a:pPr>
             <a:r>
@@ -15490,7 +15464,7 @@
           <a:bodyPr wrap="square" rtlCol="0" anchor="t"/>
           <a:lstStyle/>
           <a:p>
-            <a:pPr indent="0" marL="0">
+            <a:pPr marL="0" indent="0">
               <a:buNone/>
             </a:pPr>
             <a:r>
@@ -15504,9 +15478,6 @@
               </a:rPr>
               <a:t>→  </a:t>
             </a:r>
-            <a:pPr indent="0" marL="0">
-              <a:buNone/>
-            </a:pPr>
             <a:r>
               <a:rPr lang="en-US" sz="1200" dirty="0">
                 <a:solidFill>
@@ -15543,7 +15514,7 @@
           <a:bodyPr wrap="square" rtlCol="0" anchor="t"/>
           <a:lstStyle/>
           <a:p>
-            <a:pPr indent="0" marL="0">
+            <a:pPr marL="0" indent="0">
               <a:buNone/>
             </a:pPr>
             <a:r>
@@ -15557,9 +15528,6 @@
               </a:rPr>
               <a:t>→  </a:t>
             </a:r>
-            <a:pPr indent="0" marL="0">
-              <a:buNone/>
-            </a:pPr>
             <a:r>
               <a:rPr lang="en-US" sz="1200" dirty="0">
                 <a:solidFill>
@@ -15596,7 +15564,7 @@
           <a:bodyPr wrap="square" rtlCol="0" anchor="t"/>
           <a:lstStyle/>
           <a:p>
-            <a:pPr indent="0" marL="0">
+            <a:pPr marL="0" indent="0">
               <a:buNone/>
             </a:pPr>
             <a:r>
@@ -15610,9 +15578,6 @@
               </a:rPr>
               <a:t>→  </a:t>
             </a:r>
-            <a:pPr indent="0" marL="0">
-              <a:buNone/>
-            </a:pPr>
             <a:r>
               <a:rPr lang="en-US" sz="1200" dirty="0">
                 <a:solidFill>
@@ -15649,7 +15614,7 @@
           <a:bodyPr wrap="square" rtlCol="0" anchor="t"/>
           <a:lstStyle/>
           <a:p>
-            <a:pPr indent="0" marL="0">
+            <a:pPr marL="0" indent="0">
               <a:buNone/>
             </a:pPr>
             <a:r>
@@ -15663,9 +15628,6 @@
               </a:rPr>
               <a:t>→  </a:t>
             </a:r>
-            <a:pPr indent="0" marL="0">
-              <a:buNone/>
-            </a:pPr>
             <a:r>
               <a:rPr lang="en-US" sz="1200" dirty="0">
                 <a:solidFill>
@@ -15697,6 +15659,7 @@
         <a:solidFill>
           <a:srgbClr val="1B2E4B"/>
         </a:solidFill>
+        <a:effectLst/>
       </p:bgPr>
     </p:bg>
     <p:spTree>
@@ -16282,7 +16245,7 @@
           <a:bodyPr wrap="square" rtlCol="0" anchor="ctr"/>
           <a:lstStyle/>
           <a:p>
-            <a:pPr indent="0" marL="0">
+            <a:pPr marL="0" indent="0">
               <a:buNone/>
             </a:pPr>
             <a:r>
@@ -16341,7 +16304,7 @@
           <a:bodyPr wrap="square" lIns="0" tIns="0" rIns="0" bIns="0" rtlCol="0" anchor="ctr"/>
           <a:lstStyle/>
           <a:p>
-            <a:pPr algn="ctr" indent="0" marL="0">
+            <a:pPr marL="0" indent="0" algn="ctr">
               <a:buNone/>
             </a:pPr>
             <a:r>
@@ -16377,7 +16340,7 @@
           <a:bodyPr wrap="square" rtlCol="0" anchor="ctr"/>
           <a:lstStyle/>
           <a:p>
-            <a:pPr indent="0" marL="0">
+            <a:pPr marL="0" indent="0">
               <a:buNone/>
             </a:pPr>
             <a:r>
@@ -16436,7 +16399,7 @@
           <a:bodyPr wrap="square" lIns="0" tIns="0" rIns="0" bIns="0" rtlCol="0" anchor="ctr"/>
           <a:lstStyle/>
           <a:p>
-            <a:pPr algn="ctr" indent="0" marL="0">
+            <a:pPr marL="0" indent="0" algn="ctr">
               <a:buNone/>
             </a:pPr>
             <a:r>
@@ -16472,7 +16435,7 @@
           <a:bodyPr wrap="square" rtlCol="0" anchor="ctr"/>
           <a:lstStyle/>
           <a:p>
-            <a:pPr indent="0" marL="0">
+            <a:pPr marL="0" indent="0">
               <a:buNone/>
             </a:pPr>
             <a:r>
@@ -16531,7 +16494,7 @@
           <a:bodyPr wrap="square" lIns="0" tIns="0" rIns="0" bIns="0" rtlCol="0" anchor="ctr"/>
           <a:lstStyle/>
           <a:p>
-            <a:pPr algn="ctr" indent="0" marL="0">
+            <a:pPr marL="0" indent="0" algn="ctr">
               <a:buNone/>
             </a:pPr>
             <a:r>
@@ -16567,7 +16530,7 @@
           <a:bodyPr wrap="square" rtlCol="0" anchor="ctr"/>
           <a:lstStyle/>
           <a:p>
-            <a:pPr indent="0" marL="0">
+            <a:pPr marL="0" indent="0">
               <a:buNone/>
             </a:pPr>
             <a:r>
@@ -16626,7 +16589,7 @@
           <a:bodyPr wrap="square" lIns="0" tIns="0" rIns="0" bIns="0" rtlCol="0" anchor="ctr"/>
           <a:lstStyle/>
           <a:p>
-            <a:pPr algn="ctr" indent="0" marL="0">
+            <a:pPr marL="0" indent="0" algn="ctr">
               <a:buNone/>
             </a:pPr>
             <a:r>
@@ -16662,7 +16625,7 @@
           <a:bodyPr wrap="square" rtlCol="0" anchor="ctr"/>
           <a:lstStyle/>
           <a:p>
-            <a:pPr indent="0" marL="0">
+            <a:pPr marL="0" indent="0">
               <a:buNone/>
             </a:pPr>
             <a:r>
@@ -16721,7 +16684,7 @@
           <a:bodyPr wrap="square" lIns="0" tIns="0" rIns="0" bIns="0" rtlCol="0" anchor="ctr"/>
           <a:lstStyle/>
           <a:p>
-            <a:pPr algn="ctr" indent="0" marL="0">
+            <a:pPr marL="0" indent="0" algn="ctr">
               <a:buNone/>
             </a:pPr>
             <a:r>
@@ -16757,7 +16720,7 @@
           <a:bodyPr wrap="square" rtlCol="0" anchor="ctr"/>
           <a:lstStyle/>
           <a:p>
-            <a:pPr indent="0" marL="0">
+            <a:pPr marL="0" indent="0">
               <a:buNone/>
             </a:pPr>
             <a:r>
@@ -16818,7 +16781,7 @@
           <a:bodyPr wrap="square" rtlCol="0" anchor="ctr"/>
           <a:lstStyle/>
           <a:p>
-            <a:pPr algn="ctr" indent="0" marL="0">
+            <a:pPr marL="0" indent="0" algn="ctr">
               <a:buNone/>
             </a:pPr>
             <a:r>
@@ -16852,6 +16815,7 @@
         <a:solidFill>
           <a:srgbClr val="F7F9FC"/>
         </a:solidFill>
+        <a:effectLst/>
       </p:bgPr>
     </p:bg>
     <p:spTree>
@@ -16889,7 +16853,7 @@
           <a:bodyPr wrap="square" rtlCol="0" anchor="ctr"/>
           <a:lstStyle/>
           <a:p>
-            <a:pPr indent="0" marL="0">
+            <a:pPr marL="0" indent="0">
               <a:buNone/>
             </a:pPr>
             <a:r>
@@ -16931,7 +16895,7 @@
             <a:prstDash val="solid"/>
           </a:ln>
           <a:effectLst>
-            <a:outerShdw sx="100000" sy="100000" kx="0" ky="0" algn="bl" rotWithShape="0" blurRad="101600" dist="25400" dir="8100000">
+            <a:outerShdw blurRad="101600" dist="25400" dir="8100000" algn="bl" rotWithShape="0">
               <a:srgbClr val="000000">
                 <a:alpha val="11000"/>
               </a:srgbClr>
@@ -16980,7 +16944,7 @@
           <a:bodyPr wrap="square" rtlCol="0" anchor="ctr"/>
           <a:lstStyle/>
           <a:p>
-            <a:pPr indent="0" marL="0">
+            <a:pPr marL="0" indent="0">
               <a:buNone/>
             </a:pPr>
             <a:r>
@@ -17022,7 +16986,7 @@
             <a:prstDash val="solid"/>
           </a:ln>
           <a:effectLst>
-            <a:outerShdw sx="100000" sy="100000" kx="0" ky="0" algn="bl" rotWithShape="0" blurRad="101600" dist="25400" dir="8100000">
+            <a:outerShdw blurRad="101600" dist="25400" dir="8100000" algn="bl" rotWithShape="0">
               <a:srgbClr val="000000">
                 <a:alpha val="11000"/>
               </a:srgbClr>
@@ -17071,7 +17035,7 @@
           <a:bodyPr wrap="square" rtlCol="0" anchor="ctr"/>
           <a:lstStyle/>
           <a:p>
-            <a:pPr indent="0" marL="0">
+            <a:pPr marL="0" indent="0">
               <a:buNone/>
             </a:pPr>
             <a:r>
@@ -17110,7 +17074,7 @@
           <a:bodyPr wrap="square" rtlCol="0" anchor="ctr"/>
           <a:lstStyle/>
           <a:p>
-            <a:pPr indent="0" marL="0">
+            <a:pPr marL="0" indent="0">
               <a:buNone/>
             </a:pPr>
             <a:r>
@@ -17149,7 +17113,7 @@
           <a:bodyPr wrap="square" rtlCol="0" anchor="ctr"/>
           <a:lstStyle/>
           <a:p>
-            <a:pPr indent="0" marL="0">
+            <a:pPr marL="0" indent="0">
               <a:buNone/>
             </a:pPr>
             <a:r>
@@ -17191,7 +17155,7 @@
             <a:prstDash val="solid"/>
           </a:ln>
           <a:effectLst>
-            <a:outerShdw sx="100000" sy="100000" kx="0" ky="0" algn="bl" rotWithShape="0" blurRad="101600" dist="25400" dir="8100000">
+            <a:outerShdw blurRad="101600" dist="25400" dir="8100000" algn="bl" rotWithShape="0">
               <a:srgbClr val="000000">
                 <a:alpha val="11000"/>
               </a:srgbClr>
@@ -17240,7 +17204,7 @@
           <a:bodyPr wrap="square" rtlCol="0" anchor="ctr"/>
           <a:lstStyle/>
           <a:p>
-            <a:pPr indent="0" marL="0">
+            <a:pPr marL="0" indent="0">
               <a:buNone/>
             </a:pPr>
             <a:r>
@@ -17279,7 +17243,7 @@
           <a:bodyPr wrap="square" rtlCol="0" anchor="ctr"/>
           <a:lstStyle/>
           <a:p>
-            <a:pPr indent="0" marL="0">
+            <a:pPr marL="0" indent="0">
               <a:buNone/>
             </a:pPr>
             <a:r>
@@ -17318,7 +17282,7 @@
           <a:bodyPr wrap="square" rtlCol="0" anchor="ctr"/>
           <a:lstStyle/>
           <a:p>
-            <a:pPr indent="0" marL="0">
+            <a:pPr marL="0" indent="0">
               <a:buNone/>
             </a:pPr>
             <a:r>
@@ -17360,7 +17324,7 @@
             <a:prstDash val="solid"/>
           </a:ln>
           <a:effectLst>
-            <a:outerShdw sx="100000" sy="100000" kx="0" ky="0" algn="bl" rotWithShape="0" blurRad="101600" dist="25400" dir="8100000">
+            <a:outerShdw blurRad="101600" dist="25400" dir="8100000" algn="bl" rotWithShape="0">
               <a:srgbClr val="000000">
                 <a:alpha val="11000"/>
               </a:srgbClr>
@@ -17409,7 +17373,7 @@
           <a:bodyPr wrap="square" rtlCol="0" anchor="ctr"/>
           <a:lstStyle/>
           <a:p>
-            <a:pPr indent="0" marL="0">
+            <a:pPr marL="0" indent="0">
               <a:buNone/>
             </a:pPr>
             <a:r>
@@ -17448,7 +17412,7 @@
           <a:bodyPr wrap="square" rtlCol="0" anchor="ctr"/>
           <a:lstStyle/>
           <a:p>
-            <a:pPr indent="0" marL="0">
+            <a:pPr marL="0" indent="0">
               <a:buNone/>
             </a:pPr>
             <a:r>
@@ -17487,7 +17451,7 @@
           <a:bodyPr wrap="square" rtlCol="0" anchor="ctr"/>
           <a:lstStyle/>
           <a:p>
-            <a:pPr indent="0" marL="0">
+            <a:pPr marL="0" indent="0">
               <a:buNone/>
             </a:pPr>
             <a:r>
@@ -17521,6 +17485,7 @@
         <a:solidFill>
           <a:srgbClr val="F7F9FC"/>
         </a:solidFill>
+        <a:effectLst/>
       </p:bgPr>
     </p:bg>
     <p:spTree>
@@ -17558,7 +17523,7 @@
           <a:bodyPr wrap="square" rtlCol="0" anchor="ctr"/>
           <a:lstStyle/>
           <a:p>
-            <a:pPr indent="0" marL="0">
+            <a:pPr marL="0" indent="0">
               <a:buNone/>
             </a:pPr>
             <a:r>
@@ -17595,7 +17560,7 @@
           </a:solidFill>
           <a:ln/>
           <a:effectLst>
-            <a:outerShdw sx="100000" sy="100000" kx="0" ky="0" algn="bl" rotWithShape="0" blurRad="101600" dist="25400" dir="8100000">
+            <a:outerShdw blurRad="101600" dist="25400" dir="8100000" algn="bl" rotWithShape="0">
               <a:srgbClr val="000000">
                 <a:alpha val="11000"/>
               </a:srgbClr>
@@ -17624,7 +17589,7 @@
           <a:bodyPr wrap="square" lIns="0" tIns="0" rIns="0" bIns="0" rtlCol="0" anchor="ctr"/>
           <a:lstStyle/>
           <a:p>
-            <a:pPr algn="ctr" indent="0" marL="0">
+            <a:pPr marL="0" indent="0" algn="ctr">
               <a:buNone/>
             </a:pPr>
             <a:r>
@@ -17663,7 +17628,7 @@
           <a:bodyPr wrap="square" lIns="0" tIns="0" rIns="0" bIns="0" rtlCol="0" anchor="t"/>
           <a:lstStyle/>
           <a:p>
-            <a:pPr algn="ctr" indent="0" marL="0">
+            <a:pPr marL="0" indent="0" algn="ctr">
               <a:buNone/>
             </a:pPr>
             <a:r>
@@ -17700,7 +17665,7 @@
           </a:solidFill>
           <a:ln/>
           <a:effectLst>
-            <a:outerShdw sx="100000" sy="100000" kx="0" ky="0" algn="bl" rotWithShape="0" blurRad="101600" dist="25400" dir="8100000">
+            <a:outerShdw blurRad="101600" dist="25400" dir="8100000" algn="bl" rotWithShape="0">
               <a:srgbClr val="000000">
                 <a:alpha val="11000"/>
               </a:srgbClr>
@@ -17729,7 +17694,7 @@
           <a:bodyPr wrap="square" lIns="0" tIns="0" rIns="0" bIns="0" rtlCol="0" anchor="ctr"/>
           <a:lstStyle/>
           <a:p>
-            <a:pPr algn="ctr" indent="0" marL="0">
+            <a:pPr marL="0" indent="0" algn="ctr">
               <a:buNone/>
             </a:pPr>
             <a:r>
@@ -17768,7 +17733,7 @@
           <a:bodyPr wrap="square" lIns="0" tIns="0" rIns="0" bIns="0" rtlCol="0" anchor="t"/>
           <a:lstStyle/>
           <a:p>
-            <a:pPr algn="ctr" indent="0" marL="0">
+            <a:pPr marL="0" indent="0" algn="ctr">
               <a:buNone/>
             </a:pPr>
             <a:r>
@@ -17805,7 +17770,7 @@
           </a:solidFill>
           <a:ln/>
           <a:effectLst>
-            <a:outerShdw sx="100000" sy="100000" kx="0" ky="0" algn="bl" rotWithShape="0" blurRad="101600" dist="25400" dir="8100000">
+            <a:outerShdw blurRad="101600" dist="25400" dir="8100000" algn="bl" rotWithShape="0">
               <a:srgbClr val="000000">
                 <a:alpha val="11000"/>
               </a:srgbClr>
@@ -17834,7 +17799,7 @@
           <a:bodyPr wrap="square" lIns="0" tIns="0" rIns="0" bIns="0" rtlCol="0" anchor="ctr"/>
           <a:lstStyle/>
           <a:p>
-            <a:pPr algn="ctr" indent="0" marL="0">
+            <a:pPr marL="0" indent="0" algn="ctr">
               <a:buNone/>
             </a:pPr>
             <a:r>
@@ -17873,7 +17838,7 @@
           <a:bodyPr wrap="square" lIns="0" tIns="0" rIns="0" bIns="0" rtlCol="0" anchor="t"/>
           <a:lstStyle/>
           <a:p>
-            <a:pPr algn="ctr" indent="0" marL="0">
+            <a:pPr marL="0" indent="0" algn="ctr">
               <a:buNone/>
             </a:pPr>
             <a:r>
@@ -17890,7 +17855,7 @@
             <a:endParaRPr lang="en-US" sz="1200" dirty="0"/>
           </a:p>
           <a:p>
-            <a:pPr algn="ctr" indent="0" marL="0">
+            <a:pPr marL="0" indent="0" algn="ctr">
               <a:buNone/>
             </a:pPr>
             <a:r>
@@ -17927,7 +17892,7 @@
           </a:solidFill>
           <a:ln/>
           <a:effectLst>
-            <a:outerShdw sx="100000" sy="100000" kx="0" ky="0" algn="bl" rotWithShape="0" blurRad="101600" dist="25400" dir="8100000">
+            <a:outerShdw blurRad="101600" dist="25400" dir="8100000" algn="bl" rotWithShape="0">
               <a:srgbClr val="000000">
                 <a:alpha val="11000"/>
               </a:srgbClr>
@@ -17956,7 +17921,7 @@
           <a:bodyPr wrap="square" lIns="0" tIns="0" rIns="0" bIns="0" rtlCol="0" anchor="ctr"/>
           <a:lstStyle/>
           <a:p>
-            <a:pPr algn="ctr" indent="0" marL="0">
+            <a:pPr marL="0" indent="0" algn="ctr">
               <a:buNone/>
             </a:pPr>
             <a:r>
@@ -17995,7 +17960,7 @@
           <a:bodyPr wrap="square" lIns="0" tIns="0" rIns="0" bIns="0" rtlCol="0" anchor="t"/>
           <a:lstStyle/>
           <a:p>
-            <a:pPr algn="ctr" indent="0" marL="0">
+            <a:pPr marL="0" indent="0" algn="ctr">
               <a:buNone/>
             </a:pPr>
             <a:r>
@@ -18012,7 +17977,7 @@
             <a:endParaRPr lang="en-US" sz="1200" dirty="0"/>
           </a:p>
           <a:p>
-            <a:pPr algn="ctr" indent="0" marL="0">
+            <a:pPr marL="0" indent="0" algn="ctr">
               <a:buNone/>
             </a:pPr>
             <a:r>
@@ -18054,7 +18019,7 @@
             <a:prstDash val="solid"/>
           </a:ln>
           <a:effectLst>
-            <a:outerShdw sx="100000" sy="100000" kx="0" ky="0" algn="bl" rotWithShape="0" blurRad="101600" dist="25400" dir="8100000">
+            <a:outerShdw blurRad="101600" dist="25400" dir="8100000" algn="bl" rotWithShape="0">
               <a:srgbClr val="000000">
                 <a:alpha val="11000"/>
               </a:srgbClr>
@@ -18123,7 +18088,7 @@
           <a:bodyPr wrap="square" rtlCol="0" anchor="ctr"/>
           <a:lstStyle/>
           <a:p>
-            <a:pPr indent="0" marL="0">
+            <a:pPr marL="0" indent="0">
               <a:buNone/>
             </a:pPr>
             <a:r>
@@ -18137,9 +18102,6 @@
               </a:rPr>
               <a:t>1940s–60s  </a:t>
             </a:r>
-            <a:pPr indent="0" marL="0">
-              <a:buNone/>
-            </a:pPr>
             <a:r>
               <a:rPr lang="en-US" sz="1200" dirty="0">
                 <a:solidFill>
@@ -18176,7 +18138,7 @@
           <a:bodyPr wrap="square" rtlCol="0" anchor="ctr"/>
           <a:lstStyle/>
           <a:p>
-            <a:pPr indent="0" marL="0">
+            <a:pPr marL="0" indent="0">
               <a:buNone/>
             </a:pPr>
             <a:r>
@@ -18190,9 +18152,6 @@
               </a:rPr>
               <a:t>1960s–70s  </a:t>
             </a:r>
-            <a:pPr indent="0" marL="0">
-              <a:buNone/>
-            </a:pPr>
             <a:r>
               <a:rPr lang="en-US" sz="1200" dirty="0">
                 <a:solidFill>
@@ -18229,7 +18188,7 @@
           <a:bodyPr wrap="square" rtlCol="0" anchor="ctr"/>
           <a:lstStyle/>
           <a:p>
-            <a:pPr indent="0" marL="0">
+            <a:pPr marL="0" indent="0">
               <a:buNone/>
             </a:pPr>
             <a:r>
@@ -18243,9 +18202,6 @@
               </a:rPr>
               <a:t>1950s–90s*  </a:t>
             </a:r>
-            <a:pPr indent="0" marL="0">
-              <a:buNone/>
-            </a:pPr>
             <a:r>
               <a:rPr lang="en-US" sz="1200" dirty="0">
                 <a:solidFill>
@@ -18282,7 +18238,7 @@
           <a:bodyPr wrap="square" rtlCol="0" anchor="ctr"/>
           <a:lstStyle/>
           <a:p>
-            <a:pPr indent="0" marL="0">
+            <a:pPr marL="0" indent="0">
               <a:buNone/>
             </a:pPr>
             <a:r>
@@ -18296,9 +18252,6 @@
               </a:rPr>
               <a:t>1990s–now  </a:t>
             </a:r>
-            <a:pPr indent="0" marL="0">
-              <a:buNone/>
-            </a:pPr>
             <a:r>
               <a:rPr lang="en-US" sz="1200" dirty="0">
                 <a:solidFill>
@@ -18335,7 +18288,7 @@
           <a:bodyPr wrap="square" rtlCol="0" anchor="ctr"/>
           <a:lstStyle/>
           <a:p>
-            <a:pPr indent="0" marL="0">
+            <a:pPr marL="0" indent="0">
               <a:buNone/>
             </a:pPr>
             <a:r>
@@ -18369,6 +18322,7 @@
         <a:solidFill>
           <a:srgbClr val="F7F9FC"/>
         </a:solidFill>
+        <a:effectLst/>
       </p:bgPr>
     </p:bg>
     <p:spTree>
@@ -18406,7 +18360,7 @@
           <a:bodyPr wrap="square" rtlCol="0" anchor="ctr"/>
           <a:lstStyle/>
           <a:p>
-            <a:pPr indent="0" marL="0">
+            <a:pPr marL="0" indent="0">
               <a:buNone/>
             </a:pPr>
             <a:r>
@@ -18448,7 +18402,7 @@
             <a:prstDash val="solid"/>
           </a:ln>
           <a:effectLst>
-            <a:outerShdw sx="100000" sy="100000" kx="0" ky="0" algn="bl" rotWithShape="0" blurRad="101600" dist="25400" dir="8100000">
+            <a:outerShdw blurRad="101600" dist="25400" dir="8100000" algn="bl" rotWithShape="0">
               <a:srgbClr val="000000">
                 <a:alpha val="11000"/>
               </a:srgbClr>
@@ -18517,7 +18471,7 @@
           <a:bodyPr wrap="square" lIns="0" tIns="0" rIns="0" bIns="0" rtlCol="0" anchor="ctr"/>
           <a:lstStyle/>
           <a:p>
-            <a:pPr algn="ctr" indent="0" marL="0">
+            <a:pPr marL="0" indent="0" algn="ctr">
               <a:buNone/>
             </a:pPr>
             <a:r>
@@ -18553,7 +18507,7 @@
           <a:bodyPr wrap="square" rtlCol="0" anchor="ctr"/>
           <a:lstStyle/>
           <a:p>
-            <a:pPr indent="0" marL="0">
+            <a:pPr marL="0" indent="0">
               <a:buNone/>
             </a:pPr>
             <a:r>
@@ -18614,7 +18568,7 @@
           <a:bodyPr wrap="square" lIns="0" tIns="0" rIns="0" bIns="0" rtlCol="0" anchor="ctr"/>
           <a:lstStyle/>
           <a:p>
-            <a:pPr algn="ctr" indent="0" marL="0">
+            <a:pPr marL="0" indent="0" algn="ctr">
               <a:buNone/>
             </a:pPr>
             <a:r>
@@ -18656,7 +18610,7 @@
             <a:prstDash val="solid"/>
           </a:ln>
           <a:effectLst>
-            <a:outerShdw sx="100000" sy="100000" kx="0" ky="0" algn="bl" rotWithShape="0" blurRad="101600" dist="25400" dir="8100000">
+            <a:outerShdw blurRad="101600" dist="25400" dir="8100000" algn="bl" rotWithShape="0">
               <a:srgbClr val="000000">
                 <a:alpha val="11000"/>
               </a:srgbClr>
@@ -18725,7 +18679,7 @@
           <a:bodyPr wrap="square" lIns="0" tIns="0" rIns="0" bIns="0" rtlCol="0" anchor="ctr"/>
           <a:lstStyle/>
           <a:p>
-            <a:pPr algn="ctr" indent="0" marL="0">
+            <a:pPr marL="0" indent="0" algn="ctr">
               <a:buNone/>
             </a:pPr>
             <a:r>
@@ -18761,7 +18715,7 @@
           <a:bodyPr wrap="square" rtlCol="0" anchor="ctr"/>
           <a:lstStyle/>
           <a:p>
-            <a:pPr indent="0" marL="0">
+            <a:pPr marL="0" indent="0">
               <a:buNone/>
             </a:pPr>
             <a:r>
@@ -18822,7 +18776,7 @@
           <a:bodyPr wrap="square" lIns="0" tIns="0" rIns="0" bIns="0" rtlCol="0" anchor="ctr"/>
           <a:lstStyle/>
           <a:p>
-            <a:pPr algn="ctr" indent="0" marL="0">
+            <a:pPr marL="0" indent="0" algn="ctr">
               <a:buNone/>
             </a:pPr>
             <a:r>
@@ -18864,7 +18818,7 @@
             <a:prstDash val="solid"/>
           </a:ln>
           <a:effectLst>
-            <a:outerShdw sx="100000" sy="100000" kx="0" ky="0" algn="bl" rotWithShape="0" blurRad="101600" dist="25400" dir="8100000">
+            <a:outerShdw blurRad="101600" dist="25400" dir="8100000" algn="bl" rotWithShape="0">
               <a:srgbClr val="000000">
                 <a:alpha val="11000"/>
               </a:srgbClr>
@@ -18933,7 +18887,7 @@
           <a:bodyPr wrap="square" lIns="0" tIns="0" rIns="0" bIns="0" rtlCol="0" anchor="ctr"/>
           <a:lstStyle/>
           <a:p>
-            <a:pPr algn="ctr" indent="0" marL="0">
+            <a:pPr marL="0" indent="0" algn="ctr">
               <a:buNone/>
             </a:pPr>
             <a:r>
@@ -18969,7 +18923,7 @@
           <a:bodyPr wrap="square" rtlCol="0" anchor="ctr"/>
           <a:lstStyle/>
           <a:p>
-            <a:pPr indent="0" marL="0">
+            <a:pPr marL="0" indent="0">
               <a:buNone/>
             </a:pPr>
             <a:r>
@@ -19030,7 +18984,7 @@
           <a:bodyPr wrap="square" lIns="0" tIns="0" rIns="0" bIns="0" rtlCol="0" anchor="ctr"/>
           <a:lstStyle/>
           <a:p>
-            <a:pPr algn="ctr" indent="0" marL="0">
+            <a:pPr marL="0" indent="0" algn="ctr">
               <a:buNone/>
             </a:pPr>
             <a:r>
@@ -19072,7 +19026,7 @@
             <a:prstDash val="solid"/>
           </a:ln>
           <a:effectLst>
-            <a:outerShdw sx="100000" sy="100000" kx="0" ky="0" algn="bl" rotWithShape="0" blurRad="101600" dist="25400" dir="8100000">
+            <a:outerShdw blurRad="101600" dist="25400" dir="8100000" algn="bl" rotWithShape="0">
               <a:srgbClr val="000000">
                 <a:alpha val="11000"/>
               </a:srgbClr>
@@ -19141,7 +19095,7 @@
           <a:bodyPr wrap="square" lIns="0" tIns="0" rIns="0" bIns="0" rtlCol="0" anchor="ctr"/>
           <a:lstStyle/>
           <a:p>
-            <a:pPr algn="ctr" indent="0" marL="0">
+            <a:pPr marL="0" indent="0" algn="ctr">
               <a:buNone/>
             </a:pPr>
             <a:r>
@@ -19177,7 +19131,7 @@
           <a:bodyPr wrap="square" rtlCol="0" anchor="ctr"/>
           <a:lstStyle/>
           <a:p>
-            <a:pPr indent="0" marL="0">
+            <a:pPr marL="0" indent="0">
               <a:buNone/>
             </a:pPr>
             <a:r>
@@ -19238,7 +19192,7 @@
           <a:bodyPr wrap="square" lIns="0" tIns="0" rIns="0" bIns="0" rtlCol="0" anchor="ctr"/>
           <a:lstStyle/>
           <a:p>
-            <a:pPr algn="ctr" indent="0" marL="0">
+            <a:pPr marL="0" indent="0" algn="ctr">
               <a:buNone/>
             </a:pPr>
             <a:r>
@@ -19280,7 +19234,7 @@
             <a:prstDash val="solid"/>
           </a:ln>
           <a:effectLst>
-            <a:outerShdw sx="100000" sy="100000" kx="0" ky="0" algn="bl" rotWithShape="0" blurRad="101600" dist="25400" dir="8100000">
+            <a:outerShdw blurRad="101600" dist="25400" dir="8100000" algn="bl" rotWithShape="0">
               <a:srgbClr val="000000">
                 <a:alpha val="11000"/>
               </a:srgbClr>
@@ -19349,7 +19303,7 @@
           <a:bodyPr wrap="square" lIns="0" tIns="0" rIns="0" bIns="0" rtlCol="0" anchor="ctr"/>
           <a:lstStyle/>
           <a:p>
-            <a:pPr algn="ctr" indent="0" marL="0">
+            <a:pPr marL="0" indent="0" algn="ctr">
               <a:buNone/>
             </a:pPr>
             <a:r>
@@ -19385,7 +19339,7 @@
           <a:bodyPr wrap="square" rtlCol="0" anchor="ctr"/>
           <a:lstStyle/>
           <a:p>
-            <a:pPr indent="0" marL="0">
+            <a:pPr marL="0" indent="0">
               <a:buNone/>
             </a:pPr>
             <a:r>
@@ -19446,7 +19400,7 @@
           <a:bodyPr wrap="square" lIns="0" tIns="0" rIns="0" bIns="0" rtlCol="0" anchor="ctr"/>
           <a:lstStyle/>
           <a:p>
-            <a:pPr algn="ctr" indent="0" marL="0">
+            <a:pPr marL="0" indent="0" algn="ctr">
               <a:buNone/>
             </a:pPr>
             <a:r>
@@ -19480,6 +19434,7 @@
         <a:solidFill>
           <a:srgbClr val="1B2E4B"/>
         </a:solidFill>
+        <a:effectLst/>
       </p:bgPr>
     </p:bg>
     <p:spTree>
@@ -19867,7 +19822,7 @@
           <a:bodyPr wrap="square" lIns="0" tIns="0" rIns="0" bIns="0" rtlCol="0" anchor="ctr"/>
           <a:lstStyle/>
           <a:p>
-            <a:pPr algn="ctr" indent="0" marL="0">
+            <a:pPr marL="0" indent="0" algn="ctr">
               <a:buNone/>
             </a:pPr>
             <a:r>
@@ -19903,7 +19858,7 @@
           <a:bodyPr wrap="square" rtlCol="0" anchor="ctr"/>
           <a:lstStyle/>
           <a:p>
-            <a:pPr indent="0" marL="0">
+            <a:pPr marL="0" indent="0">
               <a:buNone/>
             </a:pPr>
             <a:r>
@@ -19942,7 +19897,7 @@
           <a:bodyPr wrap="square" rtlCol="0" anchor="ctr"/>
           <a:lstStyle/>
           <a:p>
-            <a:pPr indent="0" marL="0">
+            <a:pPr marL="0" indent="0">
               <a:buNone/>
             </a:pPr>
             <a:r>
@@ -19998,6 +19953,7 @@
         <a:solidFill>
           <a:srgbClr val="F7F9FC"/>
         </a:solidFill>
+        <a:effectLst/>
       </p:bgPr>
     </p:bg>
     <p:spTree>
@@ -20035,7 +19991,7 @@
           <a:bodyPr wrap="square" rtlCol="0" anchor="ctr"/>
           <a:lstStyle/>
           <a:p>
-            <a:pPr indent="0" marL="0">
+            <a:pPr marL="0" indent="0">
               <a:buNone/>
             </a:pPr>
             <a:r>
@@ -20076,9 +20032,27 @@
             <a:tbl>
               <a:tblPr/>
               <a:tblGrid>
-                <a:gridCol w="3931920"/>
-                <a:gridCol w="2148840"/>
-                <a:gridCol w="2148840"/>
+                <a:gridCol w="3931920">
+                  <a:extLst>
+                    <a:ext uri="{9D8B030D-6E8A-4147-A177-3AD203B41FA5}">
+                      <a16:colId xmlns:a16="http://schemas.microsoft.com/office/drawing/2014/main" val="20000"/>
+                    </a:ext>
+                  </a:extLst>
+                </a:gridCol>
+                <a:gridCol w="2148840">
+                  <a:extLst>
+                    <a:ext uri="{9D8B030D-6E8A-4147-A177-3AD203B41FA5}">
+                      <a16:colId xmlns:a16="http://schemas.microsoft.com/office/drawing/2014/main" val="20001"/>
+                    </a:ext>
+                  </a:extLst>
+                </a:gridCol>
+                <a:gridCol w="2148840">
+                  <a:extLst>
+                    <a:ext uri="{9D8B030D-6E8A-4147-A177-3AD203B41FA5}">
+                      <a16:colId xmlns:a16="http://schemas.microsoft.com/office/drawing/2014/main" val="20002"/>
+                    </a:ext>
+                  </a:extLst>
+                </a:gridCol>
               </a:tblGrid>
               <a:tr h="396240">
                 <a:tc>
@@ -20086,7 +20060,7 @@
                     <a:bodyPr/>
                     <a:lstStyle/>
                     <a:p>
-                      <a:pPr indent="0" marL="0">
+                      <a:pPr marL="0" indent="0">
                         <a:buNone/>
                       </a:pPr>
                       <a:r>
@@ -20107,7 +20081,7 @@
                       </a:endParaRPr>
                     </a:p>
                   </a:txBody>
-                  <a:tcPr marL="91440" marR="91440" marT="45720" marB="45720">
+                  <a:tcPr>
                     <a:lnL w="6350" cap="flat" cmpd="sng" algn="ctr">
                       <a:solidFill>
                         <a:srgbClr val="E2E8F0"/>
@@ -20154,7 +20128,7 @@
                     <a:bodyPr/>
                     <a:lstStyle/>
                     <a:p>
-                      <a:pPr algn="ctr" indent="0" marL="0">
+                      <a:pPr marL="0" indent="0" algn="ctr">
                         <a:buNone/>
                       </a:pPr>
                       <a:r>
@@ -20175,7 +20149,7 @@
                       </a:endParaRPr>
                     </a:p>
                   </a:txBody>
-                  <a:tcPr marL="91440" marR="91440" marT="45720" marB="45720">
+                  <a:tcPr>
                     <a:lnL w="6350" cap="flat" cmpd="sng" algn="ctr">
                       <a:solidFill>
                         <a:srgbClr val="E2E8F0"/>
@@ -20222,7 +20196,7 @@
                     <a:bodyPr/>
                     <a:lstStyle/>
                     <a:p>
-                      <a:pPr algn="ctr" indent="0" marL="0">
+                      <a:pPr marL="0" indent="0" algn="ctr">
                         <a:buNone/>
                       </a:pPr>
                       <a:r>
@@ -20243,7 +20217,7 @@
                       </a:endParaRPr>
                     </a:p>
                   </a:txBody>
-                  <a:tcPr marL="91440" marR="91440" marT="45720" marB="45720">
+                  <a:tcPr>
                     <a:lnL w="6350" cap="flat" cmpd="sng" algn="ctr">
                       <a:solidFill>
                         <a:srgbClr val="E2E8F0"/>
@@ -20285,6 +20259,11 @@
                     </a:solidFill>
                   </a:tcPr>
                 </a:tc>
+                <a:extLst>
+                  <a:ext uri="{0D108BD9-81ED-4DB2-BD59-A6C34878D82A}">
+                    <a16:rowId xmlns:a16="http://schemas.microsoft.com/office/drawing/2014/main" val="10000"/>
+                  </a:ext>
+                </a:extLst>
               </a:tr>
               <a:tr h="396240">
                 <a:tc>
@@ -20292,7 +20271,7 @@
                     <a:bodyPr/>
                     <a:lstStyle/>
                     <a:p>
-                      <a:pPr indent="0" marL="0">
+                      <a:pPr marL="0" indent="0">
                         <a:buNone/>
                       </a:pPr>
                       <a:r>
@@ -20313,7 +20292,7 @@
                       </a:endParaRPr>
                     </a:p>
                   </a:txBody>
-                  <a:tcPr marL="91440" marR="91440" marT="45720" marB="45720">
+                  <a:tcPr>
                     <a:lnL w="6350" cap="flat" cmpd="sng" algn="ctr">
                       <a:solidFill>
                         <a:srgbClr val="E2E8F0"/>
@@ -20360,7 +20339,7 @@
                     <a:bodyPr/>
                     <a:lstStyle/>
                     <a:p>
-                      <a:pPr algn="ctr" indent="0" marL="0">
+                      <a:pPr marL="0" indent="0" algn="ctr">
                         <a:buNone/>
                       </a:pPr>
                       <a:r>
@@ -20381,7 +20360,7 @@
                       </a:endParaRPr>
                     </a:p>
                   </a:txBody>
-                  <a:tcPr marL="91440" marR="91440" marT="45720" marB="45720">
+                  <a:tcPr>
                     <a:lnL w="6350" cap="flat" cmpd="sng" algn="ctr">
                       <a:solidFill>
                         <a:srgbClr val="E2E8F0"/>
@@ -20428,7 +20407,7 @@
                     <a:bodyPr/>
                     <a:lstStyle/>
                     <a:p>
-                      <a:pPr algn="ctr" indent="0" marL="0">
+                      <a:pPr marL="0" indent="0" algn="ctr">
                         <a:buNone/>
                       </a:pPr>
                       <a:r>
@@ -20449,7 +20428,7 @@
                       </a:endParaRPr>
                     </a:p>
                   </a:txBody>
-                  <a:tcPr marL="91440" marR="91440" marT="45720" marB="45720">
+                  <a:tcPr>
                     <a:lnL w="6350" cap="flat" cmpd="sng" algn="ctr">
                       <a:solidFill>
                         <a:srgbClr val="E2E8F0"/>
@@ -20491,6 +20470,11 @@
                     </a:solidFill>
                   </a:tcPr>
                 </a:tc>
+                <a:extLst>
+                  <a:ext uri="{0D108BD9-81ED-4DB2-BD59-A6C34878D82A}">
+                    <a16:rowId xmlns:a16="http://schemas.microsoft.com/office/drawing/2014/main" val="10001"/>
+                  </a:ext>
+                </a:extLst>
               </a:tr>
               <a:tr h="396240">
                 <a:tc>
@@ -20498,7 +20482,7 @@
                     <a:bodyPr/>
                     <a:lstStyle/>
                     <a:p>
-                      <a:pPr indent="0" marL="0">
+                      <a:pPr marL="0" indent="0">
                         <a:buNone/>
                       </a:pPr>
                       <a:r>
@@ -20519,7 +20503,7 @@
                       </a:endParaRPr>
                     </a:p>
                   </a:txBody>
-                  <a:tcPr marL="91440" marR="91440" marT="45720" marB="45720">
+                  <a:tcPr>
                     <a:lnL w="6350" cap="flat" cmpd="sng" algn="ctr">
                       <a:solidFill>
                         <a:srgbClr val="E2E8F0"/>
@@ -20566,7 +20550,7 @@
                     <a:bodyPr/>
                     <a:lstStyle/>
                     <a:p>
-                      <a:pPr algn="ctr" indent="0" marL="0">
+                      <a:pPr marL="0" indent="0" algn="ctr">
                         <a:buNone/>
                       </a:pPr>
                       <a:r>
@@ -20587,7 +20571,7 @@
                       </a:endParaRPr>
                     </a:p>
                   </a:txBody>
-                  <a:tcPr marL="91440" marR="91440" marT="45720" marB="45720">
+                  <a:tcPr>
                     <a:lnL w="6350" cap="flat" cmpd="sng" algn="ctr">
                       <a:solidFill>
                         <a:srgbClr val="E2E8F0"/>
@@ -20634,7 +20618,7 @@
                     <a:bodyPr/>
                     <a:lstStyle/>
                     <a:p>
-                      <a:pPr algn="ctr" indent="0" marL="0">
+                      <a:pPr marL="0" indent="0" algn="ctr">
                         <a:buNone/>
                       </a:pPr>
                       <a:r>
@@ -20655,7 +20639,7 @@
                       </a:endParaRPr>
                     </a:p>
                   </a:txBody>
-                  <a:tcPr marL="91440" marR="91440" marT="45720" marB="45720">
+                  <a:tcPr>
                     <a:lnL w="6350" cap="flat" cmpd="sng" algn="ctr">
                       <a:solidFill>
                         <a:srgbClr val="E2E8F0"/>
@@ -20697,6 +20681,11 @@
                     </a:solidFill>
                   </a:tcPr>
                 </a:tc>
+                <a:extLst>
+                  <a:ext uri="{0D108BD9-81ED-4DB2-BD59-A6C34878D82A}">
+                    <a16:rowId xmlns:a16="http://schemas.microsoft.com/office/drawing/2014/main" val="10002"/>
+                  </a:ext>
+                </a:extLst>
               </a:tr>
               <a:tr h="396240">
                 <a:tc>
@@ -20704,7 +20693,7 @@
                     <a:bodyPr/>
                     <a:lstStyle/>
                     <a:p>
-                      <a:pPr indent="0" marL="0">
+                      <a:pPr marL="0" indent="0">
                         <a:buNone/>
                       </a:pPr>
                       <a:r>
@@ -20725,7 +20714,7 @@
                       </a:endParaRPr>
                     </a:p>
                   </a:txBody>
-                  <a:tcPr marL="91440" marR="91440" marT="45720" marB="45720">
+                  <a:tcPr>
                     <a:lnL w="6350" cap="flat" cmpd="sng" algn="ctr">
                       <a:solidFill>
                         <a:srgbClr val="E2E8F0"/>
@@ -20772,7 +20761,7 @@
                     <a:bodyPr/>
                     <a:lstStyle/>
                     <a:p>
-                      <a:pPr algn="ctr" indent="0" marL="0">
+                      <a:pPr marL="0" indent="0" algn="ctr">
                         <a:buNone/>
                       </a:pPr>
                       <a:r>
@@ -20793,7 +20782,7 @@
                       </a:endParaRPr>
                     </a:p>
                   </a:txBody>
-                  <a:tcPr marL="91440" marR="91440" marT="45720" marB="45720">
+                  <a:tcPr>
                     <a:lnL w="6350" cap="flat" cmpd="sng" algn="ctr">
                       <a:solidFill>
                         <a:srgbClr val="E2E8F0"/>
@@ -20840,7 +20829,7 @@
                     <a:bodyPr/>
                     <a:lstStyle/>
                     <a:p>
-                      <a:pPr algn="ctr" indent="0" marL="0">
+                      <a:pPr marL="0" indent="0" algn="ctr">
                         <a:buNone/>
                       </a:pPr>
                       <a:r>
@@ -20861,7 +20850,7 @@
                       </a:endParaRPr>
                     </a:p>
                   </a:txBody>
-                  <a:tcPr marL="91440" marR="91440" marT="45720" marB="45720">
+                  <a:tcPr>
                     <a:lnL w="6350" cap="flat" cmpd="sng" algn="ctr">
                       <a:solidFill>
                         <a:srgbClr val="E2E8F0"/>
@@ -20903,6 +20892,11 @@
                     </a:solidFill>
                   </a:tcPr>
                 </a:tc>
+                <a:extLst>
+                  <a:ext uri="{0D108BD9-81ED-4DB2-BD59-A6C34878D82A}">
+                    <a16:rowId xmlns:a16="http://schemas.microsoft.com/office/drawing/2014/main" val="10003"/>
+                  </a:ext>
+                </a:extLst>
               </a:tr>
               <a:tr h="396240">
                 <a:tc>
@@ -20910,7 +20904,7 @@
                     <a:bodyPr/>
                     <a:lstStyle/>
                     <a:p>
-                      <a:pPr indent="0" marL="0">
+                      <a:pPr marL="0" indent="0">
                         <a:buNone/>
                       </a:pPr>
                       <a:r>
@@ -20931,7 +20925,7 @@
                       </a:endParaRPr>
                     </a:p>
                   </a:txBody>
-                  <a:tcPr marL="91440" marR="91440" marT="45720" marB="45720">
+                  <a:tcPr>
                     <a:lnL w="6350" cap="flat" cmpd="sng" algn="ctr">
                       <a:solidFill>
                         <a:srgbClr val="E2E8F0"/>
@@ -20978,7 +20972,7 @@
                     <a:bodyPr/>
                     <a:lstStyle/>
                     <a:p>
-                      <a:pPr algn="ctr" indent="0" marL="0">
+                      <a:pPr marL="0" indent="0" algn="ctr">
                         <a:buNone/>
                       </a:pPr>
                       <a:r>
@@ -20999,7 +20993,7 @@
                       </a:endParaRPr>
                     </a:p>
                   </a:txBody>
-                  <a:tcPr marL="91440" marR="91440" marT="45720" marB="45720">
+                  <a:tcPr>
                     <a:lnL w="6350" cap="flat" cmpd="sng" algn="ctr">
                       <a:solidFill>
                         <a:srgbClr val="E2E8F0"/>
@@ -21046,7 +21040,7 @@
                     <a:bodyPr/>
                     <a:lstStyle/>
                     <a:p>
-                      <a:pPr algn="ctr" indent="0" marL="0">
+                      <a:pPr marL="0" indent="0" algn="ctr">
                         <a:buNone/>
                       </a:pPr>
                       <a:r>
@@ -21067,7 +21061,7 @@
                       </a:endParaRPr>
                     </a:p>
                   </a:txBody>
-                  <a:tcPr marL="91440" marR="91440" marT="45720" marB="45720">
+                  <a:tcPr>
                     <a:lnL w="6350" cap="flat" cmpd="sng" algn="ctr">
                       <a:solidFill>
                         <a:srgbClr val="E2E8F0"/>
@@ -21109,6 +21103,11 @@
                     </a:solidFill>
                   </a:tcPr>
                 </a:tc>
+                <a:extLst>
+                  <a:ext uri="{0D108BD9-81ED-4DB2-BD59-A6C34878D82A}">
+                    <a16:rowId xmlns:a16="http://schemas.microsoft.com/office/drawing/2014/main" val="10004"/>
+                  </a:ext>
+                </a:extLst>
               </a:tr>
               <a:tr h="396240">
                 <a:tc>
@@ -21116,7 +21115,7 @@
                     <a:bodyPr/>
                     <a:lstStyle/>
                     <a:p>
-                      <a:pPr indent="0" marL="0">
+                      <a:pPr marL="0" indent="0">
                         <a:buNone/>
                       </a:pPr>
                       <a:r>
@@ -21137,7 +21136,7 @@
                       </a:endParaRPr>
                     </a:p>
                   </a:txBody>
-                  <a:tcPr marL="91440" marR="91440" marT="45720" marB="45720">
+                  <a:tcPr>
                     <a:lnL w="6350" cap="flat" cmpd="sng" algn="ctr">
                       <a:solidFill>
                         <a:srgbClr val="E2E8F0"/>
@@ -21184,7 +21183,7 @@
                     <a:bodyPr/>
                     <a:lstStyle/>
                     <a:p>
-                      <a:pPr algn="ctr" indent="0" marL="0">
+                      <a:pPr marL="0" indent="0" algn="ctr">
                         <a:buNone/>
                       </a:pPr>
                       <a:r>
@@ -21205,7 +21204,7 @@
                       </a:endParaRPr>
                     </a:p>
                   </a:txBody>
-                  <a:tcPr marL="91440" marR="91440" marT="45720" marB="45720">
+                  <a:tcPr>
                     <a:lnL w="6350" cap="flat" cmpd="sng" algn="ctr">
                       <a:solidFill>
                         <a:srgbClr val="E2E8F0"/>
@@ -21252,7 +21251,7 @@
                     <a:bodyPr/>
                     <a:lstStyle/>
                     <a:p>
-                      <a:pPr algn="ctr" indent="0" marL="0">
+                      <a:pPr marL="0" indent="0" algn="ctr">
                         <a:buNone/>
                       </a:pPr>
                       <a:r>
@@ -21273,7 +21272,7 @@
                       </a:endParaRPr>
                     </a:p>
                   </a:txBody>
-                  <a:tcPr marL="91440" marR="91440" marT="45720" marB="45720">
+                  <a:tcPr>
                     <a:lnL w="6350" cap="flat" cmpd="sng" algn="ctr">
                       <a:solidFill>
                         <a:srgbClr val="E2E8F0"/>
@@ -21315,6 +21314,11 @@
                     </a:solidFill>
                   </a:tcPr>
                 </a:tc>
+                <a:extLst>
+                  <a:ext uri="{0D108BD9-81ED-4DB2-BD59-A6C34878D82A}">
+                    <a16:rowId xmlns:a16="http://schemas.microsoft.com/office/drawing/2014/main" val="10005"/>
+                  </a:ext>
+                </a:extLst>
               </a:tr>
               <a:tr h="396240">
                 <a:tc>
@@ -21322,7 +21326,7 @@
                     <a:bodyPr/>
                     <a:lstStyle/>
                     <a:p>
-                      <a:pPr indent="0" marL="0">
+                      <a:pPr marL="0" indent="0">
                         <a:buNone/>
                       </a:pPr>
                       <a:r>
@@ -21343,7 +21347,7 @@
                       </a:endParaRPr>
                     </a:p>
                   </a:txBody>
-                  <a:tcPr marL="91440" marR="91440" marT="45720" marB="45720">
+                  <a:tcPr>
                     <a:lnL w="6350" cap="flat" cmpd="sng" algn="ctr">
                       <a:solidFill>
                         <a:srgbClr val="E2E8F0"/>
@@ -21390,7 +21394,7 @@
                     <a:bodyPr/>
                     <a:lstStyle/>
                     <a:p>
-                      <a:pPr algn="ctr" indent="0" marL="0">
+                      <a:pPr marL="0" indent="0" algn="ctr">
                         <a:buNone/>
                       </a:pPr>
                       <a:r>
@@ -21411,7 +21415,7 @@
                       </a:endParaRPr>
                     </a:p>
                   </a:txBody>
-                  <a:tcPr marL="91440" marR="91440" marT="45720" marB="45720">
+                  <a:tcPr>
                     <a:lnL w="6350" cap="flat" cmpd="sng" algn="ctr">
                       <a:solidFill>
                         <a:srgbClr val="E2E8F0"/>
@@ -21458,7 +21462,7 @@
                     <a:bodyPr/>
                     <a:lstStyle/>
                     <a:p>
-                      <a:pPr algn="ctr" indent="0" marL="0">
+                      <a:pPr marL="0" indent="0" algn="ctr">
                         <a:buNone/>
                       </a:pPr>
                       <a:r>
@@ -21479,7 +21483,7 @@
                       </a:endParaRPr>
                     </a:p>
                   </a:txBody>
-                  <a:tcPr marL="91440" marR="91440" marT="45720" marB="45720">
+                  <a:tcPr>
                     <a:lnL w="6350" cap="flat" cmpd="sng" algn="ctr">
                       <a:solidFill>
                         <a:srgbClr val="E2E8F0"/>
@@ -21521,6 +21525,11 @@
                     </a:solidFill>
                   </a:tcPr>
                 </a:tc>
+                <a:extLst>
+                  <a:ext uri="{0D108BD9-81ED-4DB2-BD59-A6C34878D82A}">
+                    <a16:rowId xmlns:a16="http://schemas.microsoft.com/office/drawing/2014/main" val="10006"/>
+                  </a:ext>
+                </a:extLst>
               </a:tr>
               <a:tr h="396240">
                 <a:tc>
@@ -21528,7 +21537,7 @@
                     <a:bodyPr/>
                     <a:lstStyle/>
                     <a:p>
-                      <a:pPr indent="0" marL="0">
+                      <a:pPr marL="0" indent="0">
                         <a:buNone/>
                       </a:pPr>
                       <a:r>
@@ -21549,7 +21558,7 @@
                       </a:endParaRPr>
                     </a:p>
                   </a:txBody>
-                  <a:tcPr marL="91440" marR="91440" marT="45720" marB="45720">
+                  <a:tcPr>
                     <a:lnL w="6350" cap="flat" cmpd="sng" algn="ctr">
                       <a:solidFill>
                         <a:srgbClr val="E2E8F0"/>
@@ -21596,7 +21605,7 @@
                     <a:bodyPr/>
                     <a:lstStyle/>
                     <a:p>
-                      <a:pPr algn="ctr" indent="0" marL="0">
+                      <a:pPr marL="0" indent="0" algn="ctr">
                         <a:buNone/>
                       </a:pPr>
                       <a:r>
@@ -21617,7 +21626,7 @@
                       </a:endParaRPr>
                     </a:p>
                   </a:txBody>
-                  <a:tcPr marL="91440" marR="91440" marT="45720" marB="45720">
+                  <a:tcPr>
                     <a:lnL w="6350" cap="flat" cmpd="sng" algn="ctr">
                       <a:solidFill>
                         <a:srgbClr val="E2E8F0"/>
@@ -21664,7 +21673,7 @@
                     <a:bodyPr/>
                     <a:lstStyle/>
                     <a:p>
-                      <a:pPr algn="ctr" indent="0" marL="0">
+                      <a:pPr marL="0" indent="0" algn="ctr">
                         <a:buNone/>
                       </a:pPr>
                       <a:r>
@@ -21685,7 +21694,7 @@
                       </a:endParaRPr>
                     </a:p>
                   </a:txBody>
-                  <a:tcPr marL="91440" marR="91440" marT="45720" marB="45720">
+                  <a:tcPr>
                     <a:lnL w="6350" cap="flat" cmpd="sng" algn="ctr">
                       <a:solidFill>
                         <a:srgbClr val="E2E8F0"/>
@@ -21727,6 +21736,11 @@
                     </a:solidFill>
                   </a:tcPr>
                 </a:tc>
+                <a:extLst>
+                  <a:ext uri="{0D108BD9-81ED-4DB2-BD59-A6C34878D82A}">
+                    <a16:rowId xmlns:a16="http://schemas.microsoft.com/office/drawing/2014/main" val="10007"/>
+                  </a:ext>
+                </a:extLst>
               </a:tr>
               <a:tr h="396240">
                 <a:tc>
@@ -21734,7 +21748,7 @@
                     <a:bodyPr/>
                     <a:lstStyle/>
                     <a:p>
-                      <a:pPr indent="0" marL="0">
+                      <a:pPr marL="0" indent="0">
                         <a:buNone/>
                       </a:pPr>
                       <a:r>
@@ -21755,7 +21769,7 @@
                       </a:endParaRPr>
                     </a:p>
                   </a:txBody>
-                  <a:tcPr marL="91440" marR="91440" marT="45720" marB="45720">
+                  <a:tcPr>
                     <a:lnL w="6350" cap="flat" cmpd="sng" algn="ctr">
                       <a:solidFill>
                         <a:srgbClr val="E2E8F0"/>
@@ -21802,7 +21816,7 @@
                     <a:bodyPr/>
                     <a:lstStyle/>
                     <a:p>
-                      <a:pPr algn="ctr" indent="0" marL="0">
+                      <a:pPr marL="0" indent="0" algn="ctr">
                         <a:buNone/>
                       </a:pPr>
                       <a:r>
@@ -21823,7 +21837,7 @@
                       </a:endParaRPr>
                     </a:p>
                   </a:txBody>
-                  <a:tcPr marL="91440" marR="91440" marT="45720" marB="45720">
+                  <a:tcPr>
                     <a:lnL w="6350" cap="flat" cmpd="sng" algn="ctr">
                       <a:solidFill>
                         <a:srgbClr val="E2E8F0"/>
@@ -21870,7 +21884,7 @@
                     <a:bodyPr/>
                     <a:lstStyle/>
                     <a:p>
-                      <a:pPr algn="ctr" indent="0" marL="0">
+                      <a:pPr marL="0" indent="0" algn="ctr">
                         <a:buNone/>
                       </a:pPr>
                       <a:r>
@@ -21891,7 +21905,7 @@
                       </a:endParaRPr>
                     </a:p>
                   </a:txBody>
-                  <a:tcPr marL="91440" marR="91440" marT="45720" marB="45720">
+                  <a:tcPr>
                     <a:lnL w="6350" cap="flat" cmpd="sng" algn="ctr">
                       <a:solidFill>
                         <a:srgbClr val="E2E8F0"/>
@@ -21933,6 +21947,11 @@
                     </a:solidFill>
                   </a:tcPr>
                 </a:tc>
+                <a:extLst>
+                  <a:ext uri="{0D108BD9-81ED-4DB2-BD59-A6C34878D82A}">
+                    <a16:rowId xmlns:a16="http://schemas.microsoft.com/office/drawing/2014/main" val="10008"/>
+                  </a:ext>
+                </a:extLst>
               </a:tr>
             </a:tbl>
           </a:graphicData>
@@ -21959,7 +21978,7 @@
           <a:bodyPr wrap="square" rtlCol="0" anchor="ctr"/>
           <a:lstStyle/>
           <a:p>
-            <a:pPr indent="0" marL="0">
+            <a:pPr marL="0" indent="0">
               <a:buNone/>
             </a:pPr>
             <a:r>
@@ -21993,6 +22012,7 @@
         <a:solidFill>
           <a:srgbClr val="F7F9FC"/>
         </a:solidFill>
+        <a:effectLst/>
       </p:bgPr>
     </p:bg>
     <p:spTree>
@@ -22030,7 +22050,7 @@
           <a:bodyPr wrap="square" rtlCol="0" anchor="ctr"/>
           <a:lstStyle/>
           <a:p>
-            <a:pPr indent="0" marL="0">
+            <a:pPr marL="0" indent="0">
               <a:buNone/>
             </a:pPr>
             <a:r>
@@ -22091,7 +22111,7 @@
           <a:bodyPr wrap="square" rtlCol="0" anchor="ctr"/>
           <a:lstStyle/>
           <a:p>
-            <a:pPr algn="ctr" indent="0" marL="0">
+            <a:pPr marL="0" indent="0" algn="ctr">
               <a:buNone/>
             </a:pPr>
             <a:r>
@@ -22150,7 +22170,7 @@
           <a:bodyPr wrap="square" lIns="0" tIns="0" rIns="0" bIns="0" rtlCol="0" anchor="ctr"/>
           <a:lstStyle/>
           <a:p>
-            <a:pPr algn="ctr" indent="0" marL="0">
+            <a:pPr marL="0" indent="0" algn="ctr">
               <a:buNone/>
             </a:pPr>
             <a:r>
@@ -22214,7 +22234,7 @@
             <a:prstDash val="solid"/>
           </a:ln>
           <a:effectLst>
-            <a:outerShdw sx="100000" sy="100000" kx="0" ky="0" algn="bl" rotWithShape="0" blurRad="101600" dist="25400" dir="8100000">
+            <a:outerShdw blurRad="101600" dist="25400" dir="8100000" algn="bl" rotWithShape="0">
               <a:srgbClr val="000000">
                 <a:alpha val="11000"/>
               </a:srgbClr>
@@ -22263,7 +22283,7 @@
           <a:bodyPr wrap="square" rtlCol="0" anchor="t"/>
           <a:lstStyle/>
           <a:p>
-            <a:pPr indent="0" marL="0">
+            <a:pPr marL="0" indent="0">
               <a:buNone/>
             </a:pPr>
             <a:r>
@@ -22280,7 +22300,7 @@
             <a:endParaRPr lang="en-US" sz="1050" dirty="0"/>
           </a:p>
           <a:p>
-            <a:pPr indent="0" marL="0">
+            <a:pPr marL="0" indent="0">
               <a:buNone/>
             </a:pPr>
             <a:r>
@@ -22297,7 +22317,7 @@
             <a:endParaRPr lang="en-US" sz="1050" dirty="0"/>
           </a:p>
           <a:p>
-            <a:pPr indent="0" marL="0">
+            <a:pPr marL="0" indent="0">
               <a:buNone/>
             </a:pPr>
             <a:r>
@@ -22314,7 +22334,7 @@
             <a:endParaRPr lang="en-US" sz="1050" dirty="0"/>
           </a:p>
           <a:p>
-            <a:pPr indent="0" marL="0">
+            <a:pPr marL="0" indent="0">
               <a:buNone/>
             </a:pPr>
             <a:r>
@@ -22353,7 +22373,7 @@
           <a:bodyPr wrap="square" rtlCol="0" anchor="ctr"/>
           <a:lstStyle/>
           <a:p>
-            <a:pPr algn="ctr" indent="0" marL="0">
+            <a:pPr marL="0" indent="0" algn="ctr">
               <a:buNone/>
             </a:pPr>
             <a:r>
@@ -22412,7 +22432,7 @@
           <a:bodyPr wrap="square" lIns="0" tIns="0" rIns="0" bIns="0" rtlCol="0" anchor="ctr"/>
           <a:lstStyle/>
           <a:p>
-            <a:pPr algn="ctr" indent="0" marL="0">
+            <a:pPr marL="0" indent="0" algn="ctr">
               <a:buNone/>
             </a:pPr>
             <a:r>
@@ -22476,7 +22496,7 @@
             <a:prstDash val="solid"/>
           </a:ln>
           <a:effectLst>
-            <a:outerShdw sx="100000" sy="100000" kx="0" ky="0" algn="bl" rotWithShape="0" blurRad="101600" dist="25400" dir="8100000">
+            <a:outerShdw blurRad="101600" dist="25400" dir="8100000" algn="bl" rotWithShape="0">
               <a:srgbClr val="000000">
                 <a:alpha val="11000"/>
               </a:srgbClr>
@@ -22525,7 +22545,7 @@
           <a:bodyPr wrap="square" rtlCol="0" anchor="t"/>
           <a:lstStyle/>
           <a:p>
-            <a:pPr indent="0" marL="0">
+            <a:pPr marL="0" indent="0">
               <a:buNone/>
             </a:pPr>
             <a:r>
@@ -22542,7 +22562,7 @@
             <a:endParaRPr lang="en-US" sz="1050" dirty="0"/>
           </a:p>
           <a:p>
-            <a:pPr indent="0" marL="0">
+            <a:pPr marL="0" indent="0">
               <a:buNone/>
             </a:pPr>
             <a:r>
@@ -22559,7 +22579,7 @@
             <a:endParaRPr lang="en-US" sz="1050" dirty="0"/>
           </a:p>
           <a:p>
-            <a:pPr indent="0" marL="0">
+            <a:pPr marL="0" indent="0">
               <a:buNone/>
             </a:pPr>
             <a:r>
@@ -22576,7 +22596,7 @@
             <a:endParaRPr lang="en-US" sz="1050" dirty="0"/>
           </a:p>
           <a:p>
-            <a:pPr indent="0" marL="0">
+            <a:pPr marL="0" indent="0">
               <a:buNone/>
             </a:pPr>
             <a:r>
@@ -22615,7 +22635,7 @@
           <a:bodyPr wrap="square" rtlCol="0" anchor="ctr"/>
           <a:lstStyle/>
           <a:p>
-            <a:pPr algn="ctr" indent="0" marL="0">
+            <a:pPr marL="0" indent="0" algn="ctr">
               <a:buNone/>
             </a:pPr>
             <a:r>
@@ -22674,7 +22694,7 @@
           <a:bodyPr wrap="square" lIns="0" tIns="0" rIns="0" bIns="0" rtlCol="0" anchor="ctr"/>
           <a:lstStyle/>
           <a:p>
-            <a:pPr algn="ctr" indent="0" marL="0">
+            <a:pPr marL="0" indent="0" algn="ctr">
               <a:buNone/>
             </a:pPr>
             <a:r>
@@ -22738,7 +22758,7 @@
             <a:prstDash val="solid"/>
           </a:ln>
           <a:effectLst>
-            <a:outerShdw sx="100000" sy="100000" kx="0" ky="0" algn="bl" rotWithShape="0" blurRad="101600" dist="25400" dir="8100000">
+            <a:outerShdw blurRad="101600" dist="25400" dir="8100000" algn="bl" rotWithShape="0">
               <a:srgbClr val="000000">
                 <a:alpha val="11000"/>
               </a:srgbClr>
@@ -22787,7 +22807,7 @@
           <a:bodyPr wrap="square" rtlCol="0" anchor="t"/>
           <a:lstStyle/>
           <a:p>
-            <a:pPr indent="0" marL="0">
+            <a:pPr marL="0" indent="0">
               <a:buNone/>
             </a:pPr>
             <a:r>
@@ -22804,7 +22824,7 @@
             <a:endParaRPr lang="en-US" sz="1050" dirty="0"/>
           </a:p>
           <a:p>
-            <a:pPr indent="0" marL="0">
+            <a:pPr marL="0" indent="0">
               <a:buNone/>
             </a:pPr>
             <a:r>
@@ -22821,7 +22841,7 @@
             <a:endParaRPr lang="en-US" sz="1050" dirty="0"/>
           </a:p>
           <a:p>
-            <a:pPr indent="0" marL="0">
+            <a:pPr marL="0" indent="0">
               <a:buNone/>
             </a:pPr>
             <a:r>
@@ -22838,7 +22858,7 @@
             <a:endParaRPr lang="en-US" sz="1050" dirty="0"/>
           </a:p>
           <a:p>
-            <a:pPr indent="0" marL="0">
+            <a:pPr marL="0" indent="0">
               <a:buNone/>
             </a:pPr>
             <a:r>
@@ -22877,7 +22897,7 @@
           <a:bodyPr wrap="square" rtlCol="0" anchor="ctr"/>
           <a:lstStyle/>
           <a:p>
-            <a:pPr algn="ctr" indent="0" marL="0">
+            <a:pPr marL="0" indent="0" algn="ctr">
               <a:buNone/>
             </a:pPr>
             <a:r>
@@ -22936,7 +22956,7 @@
           <a:bodyPr wrap="square" lIns="0" tIns="0" rIns="0" bIns="0" rtlCol="0" anchor="ctr"/>
           <a:lstStyle/>
           <a:p>
-            <a:pPr algn="ctr" indent="0" marL="0">
+            <a:pPr marL="0" indent="0" algn="ctr">
               <a:buNone/>
             </a:pPr>
             <a:r>
@@ -23000,7 +23020,7 @@
             <a:prstDash val="solid"/>
           </a:ln>
           <a:effectLst>
-            <a:outerShdw sx="100000" sy="100000" kx="0" ky="0" algn="bl" rotWithShape="0" blurRad="101600" dist="25400" dir="8100000">
+            <a:outerShdw blurRad="101600" dist="25400" dir="8100000" algn="bl" rotWithShape="0">
               <a:srgbClr val="000000">
                 <a:alpha val="11000"/>
               </a:srgbClr>
@@ -23049,7 +23069,7 @@
           <a:bodyPr wrap="square" rtlCol="0" anchor="t"/>
           <a:lstStyle/>
           <a:p>
-            <a:pPr indent="0" marL="0">
+            <a:pPr marL="0" indent="0">
               <a:buNone/>
             </a:pPr>
             <a:r>
@@ -23066,7 +23086,7 @@
             <a:endParaRPr lang="en-US" sz="1050" dirty="0"/>
           </a:p>
           <a:p>
-            <a:pPr indent="0" marL="0">
+            <a:pPr marL="0" indent="0">
               <a:buNone/>
             </a:pPr>
             <a:r>
@@ -23083,7 +23103,7 @@
             <a:endParaRPr lang="en-US" sz="1050" dirty="0"/>
           </a:p>
           <a:p>
-            <a:pPr indent="0" marL="0">
+            <a:pPr marL="0" indent="0">
               <a:buNone/>
             </a:pPr>
             <a:r>
@@ -23100,7 +23120,7 @@
             <a:endParaRPr lang="en-US" sz="1050" dirty="0"/>
           </a:p>
           <a:p>
-            <a:pPr indent="0" marL="0">
+            <a:pPr marL="0" indent="0">
               <a:buNone/>
             </a:pPr>
             <a:r>
@@ -23139,7 +23159,7 @@
           <a:bodyPr wrap="square" rtlCol="0" anchor="ctr"/>
           <a:lstStyle/>
           <a:p>
-            <a:pPr algn="ctr" indent="0" marL="0">
+            <a:pPr marL="0" indent="0" algn="ctr">
               <a:buNone/>
             </a:pPr>
             <a:r>
@@ -23198,7 +23218,7 @@
           <a:bodyPr wrap="square" lIns="0" tIns="0" rIns="0" bIns="0" rtlCol="0" anchor="ctr"/>
           <a:lstStyle/>
           <a:p>
-            <a:pPr algn="ctr" indent="0" marL="0">
+            <a:pPr marL="0" indent="0" algn="ctr">
               <a:buNone/>
             </a:pPr>
             <a:r>
@@ -23262,7 +23282,7 @@
             <a:prstDash val="solid"/>
           </a:ln>
           <a:effectLst>
-            <a:outerShdw sx="100000" sy="100000" kx="0" ky="0" algn="bl" rotWithShape="0" blurRad="101600" dist="25400" dir="8100000">
+            <a:outerShdw blurRad="101600" dist="25400" dir="8100000" algn="bl" rotWithShape="0">
               <a:srgbClr val="000000">
                 <a:alpha val="11000"/>
               </a:srgbClr>
@@ -23311,7 +23331,7 @@
           <a:bodyPr wrap="square" rtlCol="0" anchor="t"/>
           <a:lstStyle/>
           <a:p>
-            <a:pPr indent="0" marL="0">
+            <a:pPr marL="0" indent="0">
               <a:buNone/>
             </a:pPr>
             <a:r>
@@ -23328,7 +23348,7 @@
             <a:endParaRPr lang="en-US" sz="1050" dirty="0"/>
           </a:p>
           <a:p>
-            <a:pPr indent="0" marL="0">
+            <a:pPr marL="0" indent="0">
               <a:buNone/>
             </a:pPr>
             <a:r>
@@ -23345,7 +23365,7 @@
             <a:endParaRPr lang="en-US" sz="1050" dirty="0"/>
           </a:p>
           <a:p>
-            <a:pPr indent="0" marL="0">
+            <a:pPr marL="0" indent="0">
               <a:buNone/>
             </a:pPr>
             <a:r>
@@ -23362,7 +23382,7 @@
             <a:endParaRPr lang="en-US" sz="1050" dirty="0"/>
           </a:p>
           <a:p>
-            <a:pPr indent="0" marL="0">
+            <a:pPr marL="0" indent="0">
               <a:buNone/>
             </a:pPr>
             <a:r>
@@ -23401,7 +23421,7 @@
           <a:bodyPr wrap="square" rtlCol="0" anchor="ctr"/>
           <a:lstStyle/>
           <a:p>
-            <a:pPr algn="ctr" indent="0" marL="0">
+            <a:pPr marL="0" indent="0" algn="ctr">
               <a:buNone/>
             </a:pPr>
             <a:r>
@@ -23435,6 +23455,7 @@
         <a:solidFill>
           <a:srgbClr val="1B2E4B"/>
         </a:solidFill>
+        <a:effectLst/>
       </p:bgPr>
     </p:bg>
     <p:spTree>
@@ -23822,7 +23843,7 @@
           <a:bodyPr wrap="square" lIns="0" tIns="0" rIns="0" bIns="0" rtlCol="0" anchor="ctr"/>
           <a:lstStyle/>
           <a:p>
-            <a:pPr algn="ctr" indent="0" marL="0">
+            <a:pPr marL="0" indent="0" algn="ctr">
               <a:buNone/>
             </a:pPr>
             <a:r>
@@ -23858,7 +23879,7 @@
           <a:bodyPr wrap="square" rtlCol="0" anchor="ctr"/>
           <a:lstStyle/>
           <a:p>
-            <a:pPr indent="0" marL="0">
+            <a:pPr marL="0" indent="0">
               <a:buNone/>
             </a:pPr>
             <a:r>
@@ -23897,7 +23918,7 @@
           <a:bodyPr wrap="square" rtlCol="0" anchor="ctr"/>
           <a:lstStyle/>
           <a:p>
-            <a:pPr indent="0" marL="0">
+            <a:pPr marL="0" indent="0">
               <a:buNone/>
             </a:pPr>
             <a:r>
@@ -24238,4 +24259,299 @@
     </a:ext>
   </a:extLst>
 </a:theme>
+</file>
+
+<file path=ppt/theme/theme2.xml><?xml version="1.0" encoding="utf-8"?>
+<a:theme xmlns:a="http://schemas.openxmlformats.org/drawingml/2006/main" name="Office Theme">
+  <a:themeElements>
+    <a:clrScheme name="Office">
+      <a:dk1>
+        <a:sysClr val="windowText" lastClr="000000"/>
+      </a:dk1>
+      <a:lt1>
+        <a:sysClr val="window" lastClr="FFFFFF"/>
+      </a:lt1>
+      <a:dk2>
+        <a:srgbClr val="44546A"/>
+      </a:dk2>
+      <a:lt2>
+        <a:srgbClr val="E7E6E6"/>
+      </a:lt2>
+      <a:accent1>
+        <a:srgbClr val="4472C4"/>
+      </a:accent1>
+      <a:accent2>
+        <a:srgbClr val="ED7D31"/>
+      </a:accent2>
+      <a:accent3>
+        <a:srgbClr val="A5A5A5"/>
+      </a:accent3>
+      <a:accent4>
+        <a:srgbClr val="FFC000"/>
+      </a:accent4>
+      <a:accent5>
+        <a:srgbClr val="5B9BD5"/>
+      </a:accent5>
+      <a:accent6>
+        <a:srgbClr val="70AD47"/>
+      </a:accent6>
+      <a:hlink>
+        <a:srgbClr val="0563C1"/>
+      </a:hlink>
+      <a:folHlink>
+        <a:srgbClr val="954F72"/>
+      </a:folHlink>
+    </a:clrScheme>
+    <a:fontScheme name="Office">
+      <a:majorFont>
+        <a:latin typeface="Calibri Light" panose="020F0302020204030204"/>
+        <a:ea typeface=""/>
+        <a:cs typeface=""/>
+        <a:font script="Jpan" typeface="游ゴシック Light"/>
+        <a:font script="Hang" typeface="맑은 고딕"/>
+        <a:font script="Hans" typeface="等线 Light"/>
+        <a:font script="Hant" typeface="新細明體"/>
+        <a:font script="Arab" typeface="Times New Roman"/>
+        <a:font script="Hebr" typeface="Times New Roman"/>
+        <a:font script="Thai" typeface="Angsana New"/>
+        <a:font script="Ethi" typeface="Nyala"/>
+        <a:font script="Beng" typeface="Vrinda"/>
+        <a:font script="Gujr" typeface="Shruti"/>
+        <a:font script="Khmr" typeface="MoolBoran"/>
+        <a:font script="Knda" typeface="Tunga"/>
+        <a:font script="Guru" typeface="Raavi"/>
+        <a:font script="Cans" typeface="Euphemia"/>
+        <a:font script="Cher" typeface="Plantagenet Cherokee"/>
+        <a:font script="Yiii" typeface="Microsoft Yi Baiti"/>
+        <a:font script="Tibt" typeface="Microsoft Himalaya"/>
+        <a:font script="Thaa" typeface="MV Boli"/>
+        <a:font script="Deva" typeface="Mangal"/>
+        <a:font script="Telu" typeface="Gautami"/>
+        <a:font script="Taml" typeface="Latha"/>
+        <a:font script="Syrc" typeface="Estrangelo Edessa"/>
+        <a:font script="Orya" typeface="Kalinga"/>
+        <a:font script="Mlym" typeface="Kartika"/>
+        <a:font script="Laoo" typeface="DokChampa"/>
+        <a:font script="Sinh" typeface="Iskoola Pota"/>
+        <a:font script="Mong" typeface="Mongolian Baiti"/>
+        <a:font script="Viet" typeface="Times New Roman"/>
+        <a:font script="Uigh" typeface="Microsoft Uighur"/>
+        <a:font script="Geor" typeface="Sylfaen"/>
+        <a:font script="Armn" typeface="Arial"/>
+        <a:font script="Bugi" typeface="Leelawadee UI"/>
+        <a:font script="Bopo" typeface="Microsoft JhengHei"/>
+        <a:font script="Java" typeface="Javanese Text"/>
+        <a:font script="Lisu" typeface="Segoe UI"/>
+        <a:font script="Mymr" typeface="Myanmar Text"/>
+        <a:font script="Nkoo" typeface="Ebrima"/>
+        <a:font script="Olck" typeface="Nirmala UI"/>
+        <a:font script="Osma" typeface="Ebrima"/>
+        <a:font script="Phag" typeface="Phagspa"/>
+        <a:font script="Syrn" typeface="Estrangelo Edessa"/>
+        <a:font script="Syrj" typeface="Estrangelo Edessa"/>
+        <a:font script="Syre" typeface="Estrangelo Edessa"/>
+        <a:font script="Sora" typeface="Nirmala UI"/>
+        <a:font script="Tale" typeface="Microsoft Tai Le"/>
+        <a:font script="Talu" typeface="Microsoft New Tai Lue"/>
+        <a:font script="Tfng" typeface="Ebrima"/>
+      </a:majorFont>
+      <a:minorFont>
+        <a:latin typeface="Calibri" panose="020F0502020204030204"/>
+        <a:ea typeface=""/>
+        <a:cs typeface=""/>
+        <a:font script="Jpan" typeface="游ゴシック"/>
+        <a:font script="Hang" typeface="맑은 고딕"/>
+        <a:font script="Hans" typeface="等线"/>
+        <a:font script="Hant" typeface="新細明體"/>
+        <a:font script="Arab" typeface="Arial"/>
+        <a:font script="Hebr" typeface="Arial"/>
+        <a:font script="Thai" typeface="Cordia New"/>
+        <a:font script="Ethi" typeface="Nyala"/>
+        <a:font script="Beng" typeface="Vrinda"/>
+        <a:font script="Gujr" typeface="Shruti"/>
+        <a:font script="Khmr" typeface="DaunPenh"/>
+        <a:font script="Knda" typeface="Tunga"/>
+        <a:font script="Guru" typeface="Raavi"/>
+        <a:font script="Cans" typeface="Euphemia"/>
+        <a:font script="Cher" typeface="Plantagenet Cherokee"/>
+        <a:font script="Yiii" typeface="Microsoft Yi Baiti"/>
+        <a:font script="Tibt" typeface="Microsoft Himalaya"/>
+        <a:font script="Thaa" typeface="MV Boli"/>
+        <a:font script="Deva" typeface="Mangal"/>
+        <a:font script="Telu" typeface="Gautami"/>
+        <a:font script="Taml" typeface="Latha"/>
+        <a:font script="Syrc" typeface="Estrangelo Edessa"/>
+        <a:font script="Orya" typeface="Kalinga"/>
+        <a:font script="Mlym" typeface="Kartika"/>
+        <a:font script="Laoo" typeface="DokChampa"/>
+        <a:font script="Sinh" typeface="Iskoola Pota"/>
+        <a:font script="Mong" typeface="Mongolian Baiti"/>
+        <a:font script="Viet" typeface="Arial"/>
+        <a:font script="Uigh" typeface="Microsoft Uighur"/>
+        <a:font script="Geor" typeface="Sylfaen"/>
+        <a:font script="Armn" typeface="Arial"/>
+        <a:font script="Bugi" typeface="Leelawadee UI"/>
+        <a:font script="Bopo" typeface="Microsoft JhengHei"/>
+        <a:font script="Java" typeface="Javanese Text"/>
+        <a:font script="Lisu" typeface="Segoe UI"/>
+        <a:font script="Mymr" typeface="Myanmar Text"/>
+        <a:font script="Nkoo" typeface="Ebrima"/>
+        <a:font script="Olck" typeface="Nirmala UI"/>
+        <a:font script="Osma" typeface="Ebrima"/>
+        <a:font script="Phag" typeface="Phagspa"/>
+        <a:font script="Syrn" typeface="Estrangelo Edessa"/>
+        <a:font script="Syrj" typeface="Estrangelo Edessa"/>
+        <a:font script="Syre" typeface="Estrangelo Edessa"/>
+        <a:font script="Sora" typeface="Nirmala UI"/>
+        <a:font script="Tale" typeface="Microsoft Tai Le"/>
+        <a:font script="Talu" typeface="Microsoft New Tai Lue"/>
+        <a:font script="Tfng" typeface="Ebrima"/>
+      </a:minorFont>
+    </a:fontScheme>
+    <a:fmtScheme name="Office">
+      <a:fillStyleLst>
+        <a:solidFill>
+          <a:schemeClr val="phClr"/>
+        </a:solidFill>
+        <a:gradFill rotWithShape="1">
+          <a:gsLst>
+            <a:gs pos="0">
+              <a:schemeClr val="phClr">
+                <a:lumMod val="110000"/>
+                <a:satMod val="105000"/>
+                <a:tint val="67000"/>
+              </a:schemeClr>
+            </a:gs>
+            <a:gs pos="50000">
+              <a:schemeClr val="phClr">
+                <a:lumMod val="105000"/>
+                <a:satMod val="103000"/>
+                <a:tint val="73000"/>
+              </a:schemeClr>
+            </a:gs>
+            <a:gs pos="100000">
+              <a:schemeClr val="phClr">
+                <a:lumMod val="105000"/>
+                <a:satMod val="109000"/>
+                <a:tint val="81000"/>
+              </a:schemeClr>
+            </a:gs>
+          </a:gsLst>
+          <a:lin ang="5400000" scaled="0"/>
+        </a:gradFill>
+        <a:gradFill rotWithShape="1">
+          <a:gsLst>
+            <a:gs pos="0">
+              <a:schemeClr val="phClr">
+                <a:satMod val="103000"/>
+                <a:lumMod val="102000"/>
+                <a:tint val="94000"/>
+              </a:schemeClr>
+            </a:gs>
+            <a:gs pos="50000">
+              <a:schemeClr val="phClr">
+                <a:satMod val="110000"/>
+                <a:lumMod val="100000"/>
+                <a:shade val="100000"/>
+              </a:schemeClr>
+            </a:gs>
+            <a:gs pos="100000">
+              <a:schemeClr val="phClr">
+                <a:lumMod val="99000"/>
+                <a:satMod val="120000"/>
+                <a:shade val="78000"/>
+              </a:schemeClr>
+            </a:gs>
+          </a:gsLst>
+          <a:lin ang="5400000" scaled="0"/>
+        </a:gradFill>
+      </a:fillStyleLst>
+      <a:lnStyleLst>
+        <a:ln w="6350" cap="flat" cmpd="sng" algn="ctr">
+          <a:solidFill>
+            <a:schemeClr val="phClr"/>
+          </a:solidFill>
+          <a:prstDash val="solid"/>
+          <a:miter lim="800000"/>
+        </a:ln>
+        <a:ln w="12700" cap="flat" cmpd="sng" algn="ctr">
+          <a:solidFill>
+            <a:schemeClr val="phClr"/>
+          </a:solidFill>
+          <a:prstDash val="solid"/>
+          <a:miter lim="800000"/>
+        </a:ln>
+        <a:ln w="19050" cap="flat" cmpd="sng" algn="ctr">
+          <a:solidFill>
+            <a:schemeClr val="phClr"/>
+          </a:solidFill>
+          <a:prstDash val="solid"/>
+          <a:miter lim="800000"/>
+        </a:ln>
+      </a:lnStyleLst>
+      <a:effectStyleLst>
+        <a:effectStyle>
+          <a:effectLst/>
+        </a:effectStyle>
+        <a:effectStyle>
+          <a:effectLst/>
+        </a:effectStyle>
+        <a:effectStyle>
+          <a:effectLst>
+            <a:outerShdw blurRad="57150" dist="19050" dir="5400000" algn="ctr" rotWithShape="0">
+              <a:srgbClr val="000000">
+                <a:alpha val="63000"/>
+              </a:srgbClr>
+            </a:outerShdw>
+          </a:effectLst>
+        </a:effectStyle>
+      </a:effectStyleLst>
+      <a:bgFillStyleLst>
+        <a:solidFill>
+          <a:schemeClr val="phClr"/>
+        </a:solidFill>
+        <a:solidFill>
+          <a:schemeClr val="phClr">
+            <a:tint val="95000"/>
+            <a:satMod val="170000"/>
+          </a:schemeClr>
+        </a:solidFill>
+        <a:gradFill rotWithShape="1">
+          <a:gsLst>
+            <a:gs pos="0">
+              <a:schemeClr val="phClr">
+                <a:tint val="93000"/>
+                <a:satMod val="150000"/>
+                <a:shade val="98000"/>
+                <a:lumMod val="102000"/>
+              </a:schemeClr>
+            </a:gs>
+            <a:gs pos="50000">
+              <a:schemeClr val="phClr">
+                <a:tint val="98000"/>
+                <a:satMod val="130000"/>
+                <a:shade val="90000"/>
+                <a:lumMod val="103000"/>
+              </a:schemeClr>
+            </a:gs>
+            <a:gs pos="100000">
+              <a:schemeClr val="phClr">
+                <a:shade val="63000"/>
+                <a:satMod val="120000"/>
+              </a:schemeClr>
+            </a:gs>
+          </a:gsLst>
+          <a:lin ang="5400000" scaled="0"/>
+        </a:gradFill>
+      </a:bgFillStyleLst>
+    </a:fmtScheme>
+  </a:themeElements>
+  <a:objectDefaults/>
+  <a:extraClrSchemeLst/>
+  <a:extLst>
+    <a:ext uri="{05A4C25C-085E-4340-85A3-A5531E510DB2}">
+      <thm15:themeFamily xmlns:thm15="http://schemas.microsoft.com/office/thememl/2012/main" name="Office Theme" id="{62F939B6-93AF-4DB8-9C6B-D6C7DFDC589F}" vid="{4A3C46E8-61CC-4603-A589-7422A47A8E4A}"/>
+    </a:ext>
+  </a:extLst>
+</a:theme>
 </file>